--- a/reports/GroupMeeting_2026-04-17.pptx
+++ b/reports/GroupMeeting_2026-04-17.pptx
@@ -14,9 +14,8 @@
     <p:sldId id="259" r:id="rId7"/>
     <p:sldId id="260" r:id="rId8"/>
     <p:sldId id="261" r:id="rId9"/>
-    <p:sldId id="263" r:id="rId10"/>
-    <p:sldId id="264" r:id="rId11"/>
-    <p:sldId id="265" r:id="rId12"/>
+    <p:sldId id="264" r:id="rId10"/>
+    <p:sldId id="265" r:id="rId11"/>
   </p:sldIdLst>
   <p:sldSz cx="12192000" cy="6858000"/>
   <p:notesSz cx="6858000" cy="12192000"/>
@@ -1009,84 +1008,6 @@
 </file>
 
 <file path=ppt/notesSlides/notesSlide8.xml><?xml version="1.0" encoding="utf-8"?>
-<p:notes xmlns:a="http://schemas.openxmlformats.org/drawingml/2006/main" xmlns:r="http://schemas.openxmlformats.org/officeDocument/2006/relationships" xmlns:p="http://schemas.openxmlformats.org/presentationml/2006/main">
-  <p:cSld>
-    <p:spTree>
-      <p:nvGrpSpPr>
-        <p:cNvPr id="1" name=""/>
-        <p:cNvGrpSpPr/>
-        <p:nvPr/>
-      </p:nvGrpSpPr>
-      <p:grpSpPr>
-        <a:xfrm>
-          <a:off x="0" y="0"/>
-          <a:ext cx="0" cy="0"/>
-          <a:chOff x="0" y="0"/>
-          <a:chExt cx="0" cy="0"/>
-        </a:xfrm>
-      </p:grpSpPr>
-      <p:sp>
-        <p:nvSpPr>
-          <p:cNvPr id="2" name="Slide Image Placeholder 1"/>
-          <p:cNvSpPr>
-            <a:spLocks noGrp="1" noRot="1" noChangeAspect="1"/>
-          </p:cNvSpPr>
-          <p:nvPr>
-            <p:ph type="sldImg"/>
-          </p:nvPr>
-        </p:nvSpPr>
-        <p:spPr/>
-      </p:sp>
-      <p:sp>
-        <p:nvSpPr>
-          <p:cNvPr id="3" name="Notes Placeholder 2"/>
-          <p:cNvSpPr>
-            <a:spLocks noGrp="1"/>
-          </p:cNvSpPr>
-          <p:nvPr>
-            <p:ph type="body" idx="1"/>
-          </p:nvPr>
-        </p:nvSpPr>
-        <p:spPr/>
-        <p:txBody>
-          <a:bodyPr/>
-          <a:lstStyle/>
-          <a:p>
-            <a:endParaRPr lang="en-US" dirty="0"/>
-          </a:p>
-        </p:txBody>
-      </p:sp>
-      <p:sp>
-        <p:nvSpPr>
-          <p:cNvPr id="4" name="Slide Number Placeholder 3"/>
-          <p:cNvSpPr>
-            <a:spLocks noGrp="1"/>
-          </p:cNvSpPr>
-          <p:nvPr>
-            <p:ph type="sldNum" sz="quarter" idx="10"/>
-          </p:nvPr>
-        </p:nvSpPr>
-        <p:spPr/>
-        <p:txBody>
-          <a:bodyPr/>
-          <a:lstStyle/>
-          <a:p>
-            <a:fld id="{F7021451-1387-4CA6-816F-3879F97B5CBC}" type="slidenum">
-              <a:rPr lang="en-US"/>
-            </a:fld>
-            <a:endParaRPr lang="en-US"/>
-          </a:p>
-        </p:txBody>
-      </p:sp>
-    </p:spTree>
-  </p:cSld>
-  <p:clrMapOvr>
-    <a:masterClrMapping/>
-  </p:clrMapOvr>
-</p:notes>
-</file>
-
-<file path=ppt/notesSlides/notesSlide9.xml><?xml version="1.0" encoding="utf-8"?>
 <p:notes xmlns:a="http://schemas.openxmlformats.org/drawingml/2006/main" xmlns:r="http://schemas.openxmlformats.org/officeDocument/2006/relationships" xmlns:p="http://schemas.openxmlformats.org/presentationml/2006/main">
   <p:cSld>
     <p:spTree>
@@ -2120,8 +2041,25 @@
                 <a:ea typeface="Arial" panose="020B0604020202090204" pitchFamily="34" charset="-122"/>
                 <a:cs typeface="Arial" panose="020B0604020202090204" pitchFamily="34" charset="-120"/>
               </a:rPr>
-              <a:t>50 ns complete · 25,000 Gaussians (50 ns / 2 ps PACE) · 48 kJ/mol bias · 0 NaN — mechanically clean</a:t>
-            </a:r>
+              <a:t>50 ns complete · 25,000 Gaussians (50 ns / 2 ps PACE) · 48 kJ/mol bias · 0 NaN — mechanically clean. BUT s(R) ∈ [1.00, 1.63] for the full 50 ns — walker never left O basin </a:t>
+            </a:r>
+            <a:endParaRPr lang="en-US" sz="1400" dirty="0">
+              <a:solidFill>
+                <a:srgbClr val="000000"/>
+              </a:solidFill>
+              <a:latin typeface="Arial" panose="020B0604020202090204" pitchFamily="34" charset="0"/>
+              <a:ea typeface="Arial" panose="020B0604020202090204" pitchFamily="34" charset="-122"/>
+              <a:cs typeface="Arial" panose="020B0604020202090204" pitchFamily="34" charset="-120"/>
+            </a:endParaRPr>
+          </a:p>
+          <a:p>
+            <a:pPr marL="342900" indent="-342900" algn="l">
+              <a:spcAft>
+                <a:spcPts val="600"/>
+              </a:spcAft>
+              <a:buSzPct val="100000"/>
+              <a:buChar char="•"/>
+            </a:pPr>
             <a:r>
               <a:rPr lang="en-US" sz="1400" dirty="0">
                 <a:solidFill>
@@ -2131,19 +2069,25 @@
                 <a:ea typeface="Arial" panose="020B0604020202090204" pitchFamily="34" charset="-122"/>
                 <a:cs typeface="Arial" panose="020B0604020202090204" pitchFamily="34" charset="-120"/>
               </a:rPr>
-              <a:t>BUT s(R) ∈ [1.00, 1.63] for the full 50 ns — walker never left O basin</a:t>
-            </a:r>
-            <a:r>
-              <a:rPr lang="en-US" sz="1400" dirty="0">
-                <a:solidFill>
-                  <a:srgbClr val="000000"/>
-                </a:solidFill>
-                <a:latin typeface="Arial" panose="020B0604020202090204" pitchFamily="34" charset="0"/>
-                <a:ea typeface="Arial" panose="020B0604020202090204" pitchFamily="34" charset="-122"/>
-                <a:cs typeface="Arial" panose="020B0604020202090204" pitchFamily="34" charset="-120"/>
-              </a:rPr>
               <a:t>HILLS column 4 (sigma_path.sss) collapsed to 0.011–0.072 s-units — 0.07–0.5 % of path axis</a:t>
             </a:r>
+            <a:endParaRPr lang="en-US" sz="1400" dirty="0">
+              <a:solidFill>
+                <a:srgbClr val="000000"/>
+              </a:solidFill>
+              <a:latin typeface="Arial" panose="020B0604020202090204" pitchFamily="34" charset="0"/>
+              <a:ea typeface="Arial" panose="020B0604020202090204" pitchFamily="34" charset="-122"/>
+              <a:cs typeface="Arial" panose="020B0604020202090204" pitchFamily="34" charset="-120"/>
+            </a:endParaRPr>
+          </a:p>
+          <a:p>
+            <a:pPr marL="342900" indent="-342900" algn="l">
+              <a:spcAft>
+                <a:spcPts val="600"/>
+              </a:spcAft>
+              <a:buSzPct val="100000"/>
+              <a:buChar char="•"/>
+            </a:pPr>
             <a:r>
               <a:rPr lang="en-US" sz="1400" dirty="0">
                 <a:solidFill>
@@ -4679,3140 +4623,6 @@
                 <a:ea typeface="Arial" panose="020B0604020202090204" pitchFamily="34" charset="-122"/>
                 <a:cs typeface="Arial" panose="020B0604020202090204" pitchFamily="34" charset="-120"/>
               </a:rPr>
-              <a:t>Offline CV audit — path CV is physically correct (4HPX projects to s=14.91)</a:t>
-            </a:r>
-            <a:endParaRPr lang="en-US" sz="2200" dirty="0"/>
-          </a:p>
-        </p:txBody>
-      </p:sp>
-      <p:sp>
-        <p:nvSpPr>
-          <p:cNvPr id="4" name="Text 2"/>
-          <p:cNvSpPr/>
-          <p:nvPr/>
-        </p:nvSpPr>
-        <p:spPr>
-          <a:xfrm>
-            <a:off x="457200" y="960120"/>
-            <a:ext cx="11277295" cy="320040"/>
-          </a:xfrm>
-          <a:prstGeom prst="rect">
-            <a:avLst/>
-          </a:prstGeom>
-          <a:noFill/>
-        </p:spPr>
-        <p:txBody>
-          <a:bodyPr wrap="square" rtlCol="0" anchor="ctr"/>
-          <a:lstStyle/>
-          <a:p>
-            <a:pPr marL="0" indent="0" algn="l">
-              <a:buNone/>
-            </a:pPr>
-            <a:r>
-              <a:rPr lang="en-US" sz="1400" i="1" dirty="0">
-                <a:solidFill>
-                  <a:srgbClr val="000000"/>
-                </a:solidFill>
-                <a:latin typeface="Arial" panose="020B0604020202090204" pitchFamily="34" charset="0"/>
-                <a:ea typeface="Arial" panose="020B0604020202090204" pitchFamily="34" charset="-122"/>
-                <a:cs typeface="Arial" panose="020B0604020202090204" pitchFamily="34" charset="-120"/>
-              </a:rPr>
-              <a:t>Per Codex recommendation: project known structures onto PATHMSD with LAMBDA=379.77</a:t>
-            </a:r>
-            <a:endParaRPr lang="en-US" sz="1400" dirty="0"/>
-          </a:p>
-        </p:txBody>
-      </p:sp>
-      <p:graphicFrame>
-        <p:nvGraphicFramePr>
-          <p:cNvPr id="9" name="Table 0"/>
-          <p:cNvGraphicFramePr>
-            <a:graphicFrameLocks noGrp="1"/>
-          </p:cNvGraphicFramePr>
-          <p:nvPr/>
-        </p:nvGraphicFramePr>
-        <p:xfrm>
-          <a:off x="457200" y="1417320"/>
-          <a:ext cx="11277295" cy="1920240"/>
-        </p:xfrm>
-        <a:graphic>
-          <a:graphicData uri="http://schemas.openxmlformats.org/drawingml/2006/table">
-            <a:tbl>
-              <a:tblPr/>
-              <a:tblGrid>
-                <a:gridCol w="1005840"/>
-                <a:gridCol w="822960"/>
-                <a:gridCol w="1280160"/>
-                <a:gridCol w="1097280"/>
-                <a:gridCol w="1463040"/>
-                <a:gridCol w="5608015"/>
-              </a:tblGrid>
-              <a:tr h="274320">
-                <a:tc>
-                  <a:txBody>
-                    <a:bodyPr/>
-                    <a:lstStyle/>
-                    <a:p>
-                      <a:pPr marL="0" indent="0" algn="l">
-                        <a:buNone/>
-                      </a:pPr>
-                      <a:r>
-                        <a:rPr lang="en-US" sz="1100" b="1" dirty="0">
-                          <a:solidFill>
-                            <a:srgbClr val="000000"/>
-                          </a:solidFill>
-                          <a:latin typeface="Arial" panose="020B0604020202090204" pitchFamily="34" charset="0"/>
-                          <a:ea typeface="Arial" panose="020B0604020202090204" pitchFamily="34" charset="-122"/>
-                          <a:cs typeface="Arial" panose="020B0604020202090204" pitchFamily="34" charset="-120"/>
-                        </a:rPr>
-                        <a:t>PDB</a:t>
-                      </a:r>
-                      <a:endParaRPr lang="en-US" sz="1100" dirty="0">
-                        <a:latin typeface="Arial" panose="020B0604020202090204" pitchFamily="34" charset="0"/>
-                        <a:ea typeface="Arial" panose="020B0604020202090204" pitchFamily="34" charset="0"/>
-                        <a:cs typeface="Arial" panose="020B0604020202090204" pitchFamily="34" charset="0"/>
-                      </a:endParaRPr>
-                    </a:p>
-                  </a:txBody>
-                  <a:tcPr anchor="ctr">
-                    <a:lnL w="6350" cap="flat" cmpd="sng" algn="ctr">
-                      <a:solidFill>
-                        <a:srgbClr val="555555"/>
-                      </a:solidFill>
-                      <a:prstDash val="solid"/>
-                      <a:round/>
-                      <a:headEnd type="none" w="med" len="med"/>
-                      <a:tailEnd type="none" w="med" len="med"/>
-                    </a:lnL>
-                    <a:lnR w="6350" cap="flat" cmpd="sng" algn="ctr">
-                      <a:solidFill>
-                        <a:srgbClr val="555555"/>
-                      </a:solidFill>
-                      <a:prstDash val="solid"/>
-                      <a:round/>
-                      <a:headEnd type="none" w="med" len="med"/>
-                      <a:tailEnd type="none" w="med" len="med"/>
-                    </a:lnR>
-                    <a:lnT w="6350" cap="flat" cmpd="sng" algn="ctr">
-                      <a:solidFill>
-                        <a:srgbClr val="555555"/>
-                      </a:solidFill>
-                      <a:prstDash val="solid"/>
-                      <a:round/>
-                      <a:headEnd type="none" w="med" len="med"/>
-                      <a:tailEnd type="none" w="med" len="med"/>
-                    </a:lnT>
-                    <a:lnB w="6350" cap="flat" cmpd="sng" algn="ctr">
-                      <a:solidFill>
-                        <a:srgbClr val="555555"/>
-                      </a:solidFill>
-                      <a:prstDash val="solid"/>
-                      <a:round/>
-                      <a:headEnd type="none" w="med" len="med"/>
-                      <a:tailEnd type="none" w="med" len="med"/>
-                    </a:lnB>
-                    <a:solidFill>
-                      <a:srgbClr val="E0E0E0"/>
-                    </a:solidFill>
-                  </a:tcPr>
-                </a:tc>
-                <a:tc>
-                  <a:txBody>
-                    <a:bodyPr/>
-                    <a:lstStyle/>
-                    <a:p>
-                      <a:pPr marL="0" indent="0" algn="l">
-                        <a:buNone/>
-                      </a:pPr>
-                      <a:r>
-                        <a:rPr lang="en-US" sz="1100" b="1" dirty="0">
-                          <a:solidFill>
-                            <a:srgbClr val="000000"/>
-                          </a:solidFill>
-                          <a:latin typeface="Arial" panose="020B0604020202090204" pitchFamily="34" charset="0"/>
-                          <a:ea typeface="Arial" panose="020B0604020202090204" pitchFamily="34" charset="-122"/>
-                          <a:cs typeface="Arial" panose="020B0604020202090204" pitchFamily="34" charset="-120"/>
-                        </a:rPr>
-                        <a:t>Chain</a:t>
-                      </a:r>
-                      <a:endParaRPr lang="en-US" sz="1100" dirty="0">
-                        <a:latin typeface="Arial" panose="020B0604020202090204" pitchFamily="34" charset="0"/>
-                        <a:ea typeface="Arial" panose="020B0604020202090204" pitchFamily="34" charset="0"/>
-                        <a:cs typeface="Arial" panose="020B0604020202090204" pitchFamily="34" charset="0"/>
-                      </a:endParaRPr>
-                    </a:p>
-                  </a:txBody>
-                  <a:tcPr anchor="ctr">
-                    <a:lnL w="6350" cap="flat" cmpd="sng" algn="ctr">
-                      <a:solidFill>
-                        <a:srgbClr val="555555"/>
-                      </a:solidFill>
-                      <a:prstDash val="solid"/>
-                      <a:round/>
-                      <a:headEnd type="none" w="med" len="med"/>
-                      <a:tailEnd type="none" w="med" len="med"/>
-                    </a:lnL>
-                    <a:lnR w="6350" cap="flat" cmpd="sng" algn="ctr">
-                      <a:solidFill>
-                        <a:srgbClr val="555555"/>
-                      </a:solidFill>
-                      <a:prstDash val="solid"/>
-                      <a:round/>
-                      <a:headEnd type="none" w="med" len="med"/>
-                      <a:tailEnd type="none" w="med" len="med"/>
-                    </a:lnR>
-                    <a:lnT w="6350" cap="flat" cmpd="sng" algn="ctr">
-                      <a:solidFill>
-                        <a:srgbClr val="555555"/>
-                      </a:solidFill>
-                      <a:prstDash val="solid"/>
-                      <a:round/>
-                      <a:headEnd type="none" w="med" len="med"/>
-                      <a:tailEnd type="none" w="med" len="med"/>
-                    </a:lnT>
-                    <a:lnB w="6350" cap="flat" cmpd="sng" algn="ctr">
-                      <a:solidFill>
-                        <a:srgbClr val="555555"/>
-                      </a:solidFill>
-                      <a:prstDash val="solid"/>
-                      <a:round/>
-                      <a:headEnd type="none" w="med" len="med"/>
-                      <a:tailEnd type="none" w="med" len="med"/>
-                    </a:lnB>
-                    <a:solidFill>
-                      <a:srgbClr val="E0E0E0"/>
-                    </a:solidFill>
-                  </a:tcPr>
-                </a:tc>
-                <a:tc>
-                  <a:txBody>
-                    <a:bodyPr/>
-                    <a:lstStyle/>
-                    <a:p>
-                      <a:pPr marL="0" indent="0" algn="l">
-                        <a:buNone/>
-                      </a:pPr>
-                      <a:r>
-                        <a:rPr lang="en-US" sz="1100" b="1" dirty="0">
-                          <a:solidFill>
-                            <a:srgbClr val="000000"/>
-                          </a:solidFill>
-                          <a:latin typeface="Arial" panose="020B0604020202090204" pitchFamily="34" charset="0"/>
-                          <a:ea typeface="Arial" panose="020B0604020202090204" pitchFamily="34" charset="-122"/>
-                          <a:cs typeface="Arial" panose="020B0604020202090204" pitchFamily="34" charset="-120"/>
-                        </a:rPr>
-                        <a:t>CV cov.</a:t>
-                      </a:r>
-                      <a:endParaRPr lang="en-US" sz="1100" dirty="0">
-                        <a:latin typeface="Arial" panose="020B0604020202090204" pitchFamily="34" charset="0"/>
-                        <a:ea typeface="Arial" panose="020B0604020202090204" pitchFamily="34" charset="0"/>
-                        <a:cs typeface="Arial" panose="020B0604020202090204" pitchFamily="34" charset="0"/>
-                      </a:endParaRPr>
-                    </a:p>
-                  </a:txBody>
-                  <a:tcPr anchor="ctr">
-                    <a:lnL w="6350" cap="flat" cmpd="sng" algn="ctr">
-                      <a:solidFill>
-                        <a:srgbClr val="555555"/>
-                      </a:solidFill>
-                      <a:prstDash val="solid"/>
-                      <a:round/>
-                      <a:headEnd type="none" w="med" len="med"/>
-                      <a:tailEnd type="none" w="med" len="med"/>
-                    </a:lnL>
-                    <a:lnR w="6350" cap="flat" cmpd="sng" algn="ctr">
-                      <a:solidFill>
-                        <a:srgbClr val="555555"/>
-                      </a:solidFill>
-                      <a:prstDash val="solid"/>
-                      <a:round/>
-                      <a:headEnd type="none" w="med" len="med"/>
-                      <a:tailEnd type="none" w="med" len="med"/>
-                    </a:lnR>
-                    <a:lnT w="6350" cap="flat" cmpd="sng" algn="ctr">
-                      <a:solidFill>
-                        <a:srgbClr val="555555"/>
-                      </a:solidFill>
-                      <a:prstDash val="solid"/>
-                      <a:round/>
-                      <a:headEnd type="none" w="med" len="med"/>
-                      <a:tailEnd type="none" w="med" len="med"/>
-                    </a:lnT>
-                    <a:lnB w="6350" cap="flat" cmpd="sng" algn="ctr">
-                      <a:solidFill>
-                        <a:srgbClr val="555555"/>
-                      </a:solidFill>
-                      <a:prstDash val="solid"/>
-                      <a:round/>
-                      <a:headEnd type="none" w="med" len="med"/>
-                      <a:tailEnd type="none" w="med" len="med"/>
-                    </a:lnB>
-                    <a:solidFill>
-                      <a:srgbClr val="E0E0E0"/>
-                    </a:solidFill>
-                  </a:tcPr>
-                </a:tc>
-                <a:tc>
-                  <a:txBody>
-                    <a:bodyPr/>
-                    <a:lstStyle/>
-                    <a:p>
-                      <a:pPr marL="0" indent="0" algn="l">
-                        <a:buNone/>
-                      </a:pPr>
-                      <a:r>
-                        <a:rPr lang="en-US" sz="1100" b="1" dirty="0">
-                          <a:solidFill>
-                            <a:srgbClr val="000000"/>
-                          </a:solidFill>
-                          <a:latin typeface="Arial" panose="020B0604020202090204" pitchFamily="34" charset="0"/>
-                          <a:ea typeface="Arial" panose="020B0604020202090204" pitchFamily="34" charset="-122"/>
-                          <a:cs typeface="Arial" panose="020B0604020202090204" pitchFamily="34" charset="-120"/>
-                        </a:rPr>
-                        <a:t>s(R)</a:t>
-                      </a:r>
-                      <a:endParaRPr lang="en-US" sz="1100" dirty="0">
-                        <a:latin typeface="Arial" panose="020B0604020202090204" pitchFamily="34" charset="0"/>
-                        <a:ea typeface="Arial" panose="020B0604020202090204" pitchFamily="34" charset="0"/>
-                        <a:cs typeface="Arial" panose="020B0604020202090204" pitchFamily="34" charset="0"/>
-                      </a:endParaRPr>
-                    </a:p>
-                  </a:txBody>
-                  <a:tcPr anchor="ctr">
-                    <a:lnL w="6350" cap="flat" cmpd="sng" algn="ctr">
-                      <a:solidFill>
-                        <a:srgbClr val="555555"/>
-                      </a:solidFill>
-                      <a:prstDash val="solid"/>
-                      <a:round/>
-                      <a:headEnd type="none" w="med" len="med"/>
-                      <a:tailEnd type="none" w="med" len="med"/>
-                    </a:lnL>
-                    <a:lnR w="6350" cap="flat" cmpd="sng" algn="ctr">
-                      <a:solidFill>
-                        <a:srgbClr val="555555"/>
-                      </a:solidFill>
-                      <a:prstDash val="solid"/>
-                      <a:round/>
-                      <a:headEnd type="none" w="med" len="med"/>
-                      <a:tailEnd type="none" w="med" len="med"/>
-                    </a:lnR>
-                    <a:lnT w="6350" cap="flat" cmpd="sng" algn="ctr">
-                      <a:solidFill>
-                        <a:srgbClr val="555555"/>
-                      </a:solidFill>
-                      <a:prstDash val="solid"/>
-                      <a:round/>
-                      <a:headEnd type="none" w="med" len="med"/>
-                      <a:tailEnd type="none" w="med" len="med"/>
-                    </a:lnT>
-                    <a:lnB w="6350" cap="flat" cmpd="sng" algn="ctr">
-                      <a:solidFill>
-                        <a:srgbClr val="555555"/>
-                      </a:solidFill>
-                      <a:prstDash val="solid"/>
-                      <a:round/>
-                      <a:headEnd type="none" w="med" len="med"/>
-                      <a:tailEnd type="none" w="med" len="med"/>
-                    </a:lnB>
-                    <a:solidFill>
-                      <a:srgbClr val="E0E0E0"/>
-                    </a:solidFill>
-                  </a:tcPr>
-                </a:tc>
-                <a:tc>
-                  <a:txBody>
-                    <a:bodyPr/>
-                    <a:lstStyle/>
-                    <a:p>
-                      <a:pPr marL="0" indent="0" algn="l">
-                        <a:buNone/>
-                      </a:pPr>
-                      <a:r>
-                        <a:rPr lang="en-US" sz="1100" b="1" dirty="0">
-                          <a:solidFill>
-                            <a:srgbClr val="000000"/>
-                          </a:solidFill>
-                          <a:latin typeface="Arial" panose="020B0604020202090204" pitchFamily="34" charset="0"/>
-                          <a:ea typeface="Arial" panose="020B0604020202090204" pitchFamily="34" charset="-122"/>
-                          <a:cs typeface="Arial" panose="020B0604020202090204" pitchFamily="34" charset="-120"/>
-                        </a:rPr>
-                        <a:t>z(R) nm²</a:t>
-                      </a:r>
-                      <a:endParaRPr lang="en-US" sz="1100" dirty="0">
-                        <a:latin typeface="Arial" panose="020B0604020202090204" pitchFamily="34" charset="0"/>
-                        <a:ea typeface="Arial" panose="020B0604020202090204" pitchFamily="34" charset="0"/>
-                        <a:cs typeface="Arial" panose="020B0604020202090204" pitchFamily="34" charset="0"/>
-                      </a:endParaRPr>
-                    </a:p>
-                  </a:txBody>
-                  <a:tcPr anchor="ctr">
-                    <a:lnL w="6350" cap="flat" cmpd="sng" algn="ctr">
-                      <a:solidFill>
-                        <a:srgbClr val="555555"/>
-                      </a:solidFill>
-                      <a:prstDash val="solid"/>
-                      <a:round/>
-                      <a:headEnd type="none" w="med" len="med"/>
-                      <a:tailEnd type="none" w="med" len="med"/>
-                    </a:lnL>
-                    <a:lnR w="6350" cap="flat" cmpd="sng" algn="ctr">
-                      <a:solidFill>
-                        <a:srgbClr val="555555"/>
-                      </a:solidFill>
-                      <a:prstDash val="solid"/>
-                      <a:round/>
-                      <a:headEnd type="none" w="med" len="med"/>
-                      <a:tailEnd type="none" w="med" len="med"/>
-                    </a:lnR>
-                    <a:lnT w="6350" cap="flat" cmpd="sng" algn="ctr">
-                      <a:solidFill>
-                        <a:srgbClr val="555555"/>
-                      </a:solidFill>
-                      <a:prstDash val="solid"/>
-                      <a:round/>
-                      <a:headEnd type="none" w="med" len="med"/>
-                      <a:tailEnd type="none" w="med" len="med"/>
-                    </a:lnT>
-                    <a:lnB w="6350" cap="flat" cmpd="sng" algn="ctr">
-                      <a:solidFill>
-                        <a:srgbClr val="555555"/>
-                      </a:solidFill>
-                      <a:prstDash val="solid"/>
-                      <a:round/>
-                      <a:headEnd type="none" w="med" len="med"/>
-                      <a:tailEnd type="none" w="med" len="med"/>
-                    </a:lnB>
-                    <a:solidFill>
-                      <a:srgbClr val="E0E0E0"/>
-                    </a:solidFill>
-                  </a:tcPr>
-                </a:tc>
-                <a:tc>
-                  <a:txBody>
-                    <a:bodyPr/>
-                    <a:lstStyle/>
-                    <a:p>
-                      <a:pPr marL="0" indent="0" algn="l">
-                        <a:buNone/>
-                      </a:pPr>
-                      <a:r>
-                        <a:rPr lang="en-US" sz="1100" b="1" dirty="0">
-                          <a:solidFill>
-                            <a:srgbClr val="000000"/>
-                          </a:solidFill>
-                          <a:latin typeface="Arial" panose="020B0604020202090204" pitchFamily="34" charset="0"/>
-                          <a:ea typeface="Arial" panose="020B0604020202090204" pitchFamily="34" charset="-122"/>
-                          <a:cs typeface="Arial" panose="020B0604020202090204" pitchFamily="34" charset="-120"/>
-                        </a:rPr>
-                        <a:t>Note</a:t>
-                      </a:r>
-                      <a:endParaRPr lang="en-US" sz="1100" dirty="0">
-                        <a:latin typeface="Arial" panose="020B0604020202090204" pitchFamily="34" charset="0"/>
-                        <a:ea typeface="Arial" panose="020B0604020202090204" pitchFamily="34" charset="0"/>
-                        <a:cs typeface="Arial" panose="020B0604020202090204" pitchFamily="34" charset="0"/>
-                      </a:endParaRPr>
-                    </a:p>
-                  </a:txBody>
-                  <a:tcPr anchor="ctr">
-                    <a:lnL w="6350" cap="flat" cmpd="sng" algn="ctr">
-                      <a:solidFill>
-                        <a:srgbClr val="555555"/>
-                      </a:solidFill>
-                      <a:prstDash val="solid"/>
-                      <a:round/>
-                      <a:headEnd type="none" w="med" len="med"/>
-                      <a:tailEnd type="none" w="med" len="med"/>
-                    </a:lnL>
-                    <a:lnR w="6350" cap="flat" cmpd="sng" algn="ctr">
-                      <a:solidFill>
-                        <a:srgbClr val="555555"/>
-                      </a:solidFill>
-                      <a:prstDash val="solid"/>
-                      <a:round/>
-                      <a:headEnd type="none" w="med" len="med"/>
-                      <a:tailEnd type="none" w="med" len="med"/>
-                    </a:lnR>
-                    <a:lnT w="6350" cap="flat" cmpd="sng" algn="ctr">
-                      <a:solidFill>
-                        <a:srgbClr val="555555"/>
-                      </a:solidFill>
-                      <a:prstDash val="solid"/>
-                      <a:round/>
-                      <a:headEnd type="none" w="med" len="med"/>
-                      <a:tailEnd type="none" w="med" len="med"/>
-                    </a:lnT>
-                    <a:lnB w="6350" cap="flat" cmpd="sng" algn="ctr">
-                      <a:solidFill>
-                        <a:srgbClr val="555555"/>
-                      </a:solidFill>
-                      <a:prstDash val="solid"/>
-                      <a:round/>
-                      <a:headEnd type="none" w="med" len="med"/>
-                      <a:tailEnd type="none" w="med" len="med"/>
-                    </a:lnB>
-                    <a:solidFill>
-                      <a:srgbClr val="E0E0E0"/>
-                    </a:solidFill>
-                  </a:tcPr>
-                </a:tc>
-              </a:tr>
-              <a:tr h="274320">
-                <a:tc>
-                  <a:txBody>
-                    <a:bodyPr/>
-                    <a:lstStyle/>
-                    <a:p>
-                      <a:pPr marL="0" indent="0" algn="l">
-                        <a:buNone/>
-                      </a:pPr>
-                      <a:r>
-                        <a:rPr lang="en-US" sz="1100" dirty="0">
-                          <a:solidFill>
-                            <a:srgbClr val="000000"/>
-                          </a:solidFill>
-                          <a:latin typeface="Arial" panose="020B0604020202090204" pitchFamily="34" charset="0"/>
-                          <a:ea typeface="Arial" panose="020B0604020202090204" pitchFamily="34" charset="-122"/>
-                          <a:cs typeface="Arial" panose="020B0604020202090204" pitchFamily="34" charset="-120"/>
-                        </a:rPr>
-                        <a:t>1WDW</a:t>
-                      </a:r>
-                      <a:endParaRPr lang="en-US" sz="1100" dirty="0">
-                        <a:latin typeface="Arial" panose="020B0604020202090204" pitchFamily="34" charset="0"/>
-                        <a:ea typeface="Arial" panose="020B0604020202090204" pitchFamily="34" charset="0"/>
-                        <a:cs typeface="Arial" panose="020B0604020202090204" pitchFamily="34" charset="0"/>
-                      </a:endParaRPr>
-                    </a:p>
-                  </a:txBody>
-                  <a:tcPr anchor="ctr">
-                    <a:lnL w="6350" cap="flat" cmpd="sng" algn="ctr">
-                      <a:solidFill>
-                        <a:srgbClr val="555555"/>
-                      </a:solidFill>
-                      <a:prstDash val="solid"/>
-                      <a:round/>
-                      <a:headEnd type="none" w="med" len="med"/>
-                      <a:tailEnd type="none" w="med" len="med"/>
-                    </a:lnL>
-                    <a:lnR w="6350" cap="flat" cmpd="sng" algn="ctr">
-                      <a:solidFill>
-                        <a:srgbClr val="555555"/>
-                      </a:solidFill>
-                      <a:prstDash val="solid"/>
-                      <a:round/>
-                      <a:headEnd type="none" w="med" len="med"/>
-                      <a:tailEnd type="none" w="med" len="med"/>
-                    </a:lnR>
-                    <a:lnT w="6350" cap="flat" cmpd="sng" algn="ctr">
-                      <a:solidFill>
-                        <a:srgbClr val="555555"/>
-                      </a:solidFill>
-                      <a:prstDash val="solid"/>
-                      <a:round/>
-                      <a:headEnd type="none" w="med" len="med"/>
-                      <a:tailEnd type="none" w="med" len="med"/>
-                    </a:lnT>
-                    <a:lnB w="6350" cap="flat" cmpd="sng" algn="ctr">
-                      <a:solidFill>
-                        <a:srgbClr val="555555"/>
-                      </a:solidFill>
-                      <a:prstDash val="solid"/>
-                      <a:round/>
-                      <a:headEnd type="none" w="med" len="med"/>
-                      <a:tailEnd type="none" w="med" len="med"/>
-                    </a:lnB>
-                    <a:solidFill>
-                      <a:srgbClr val="F5F5F5"/>
-                    </a:solidFill>
-                  </a:tcPr>
-                </a:tc>
-                <a:tc>
-                  <a:txBody>
-                    <a:bodyPr/>
-                    <a:lstStyle/>
-                    <a:p>
-                      <a:pPr marL="0" indent="0" algn="l">
-                        <a:buNone/>
-                      </a:pPr>
-                      <a:r>
-                        <a:rPr lang="en-US" sz="1100" dirty="0">
-                          <a:solidFill>
-                            <a:srgbClr val="000000"/>
-                          </a:solidFill>
-                          <a:latin typeface="Arial" panose="020B0604020202090204" pitchFamily="34" charset="0"/>
-                          <a:ea typeface="Arial" panose="020B0604020202090204" pitchFamily="34" charset="-122"/>
-                          <a:cs typeface="Arial" panose="020B0604020202090204" pitchFamily="34" charset="-120"/>
-                        </a:rPr>
-                        <a:t>B</a:t>
-                      </a:r>
-                      <a:endParaRPr lang="en-US" sz="1100" dirty="0">
-                        <a:latin typeface="Arial" panose="020B0604020202090204" pitchFamily="34" charset="0"/>
-                        <a:ea typeface="Arial" panose="020B0604020202090204" pitchFamily="34" charset="0"/>
-                        <a:cs typeface="Arial" panose="020B0604020202090204" pitchFamily="34" charset="0"/>
-                      </a:endParaRPr>
-                    </a:p>
-                  </a:txBody>
-                  <a:tcPr anchor="ctr">
-                    <a:lnL w="6350" cap="flat" cmpd="sng" algn="ctr">
-                      <a:solidFill>
-                        <a:srgbClr val="555555"/>
-                      </a:solidFill>
-                      <a:prstDash val="solid"/>
-                      <a:round/>
-                      <a:headEnd type="none" w="med" len="med"/>
-                      <a:tailEnd type="none" w="med" len="med"/>
-                    </a:lnL>
-                    <a:lnR w="6350" cap="flat" cmpd="sng" algn="ctr">
-                      <a:solidFill>
-                        <a:srgbClr val="555555"/>
-                      </a:solidFill>
-                      <a:prstDash val="solid"/>
-                      <a:round/>
-                      <a:headEnd type="none" w="med" len="med"/>
-                      <a:tailEnd type="none" w="med" len="med"/>
-                    </a:lnR>
-                    <a:lnT w="6350" cap="flat" cmpd="sng" algn="ctr">
-                      <a:solidFill>
-                        <a:srgbClr val="555555"/>
-                      </a:solidFill>
-                      <a:prstDash val="solid"/>
-                      <a:round/>
-                      <a:headEnd type="none" w="med" len="med"/>
-                      <a:tailEnd type="none" w="med" len="med"/>
-                    </a:lnT>
-                    <a:lnB w="6350" cap="flat" cmpd="sng" algn="ctr">
-                      <a:solidFill>
-                        <a:srgbClr val="555555"/>
-                      </a:solidFill>
-                      <a:prstDash val="solid"/>
-                      <a:round/>
-                      <a:headEnd type="none" w="med" len="med"/>
-                      <a:tailEnd type="none" w="med" len="med"/>
-                    </a:lnB>
-                    <a:solidFill>
-                      <a:srgbClr val="F5F5F5"/>
-                    </a:solidFill>
-                  </a:tcPr>
-                </a:tc>
-                <a:tc>
-                  <a:txBody>
-                    <a:bodyPr/>
-                    <a:lstStyle/>
-                    <a:p>
-                      <a:pPr marL="0" indent="0" algn="l">
-                        <a:buNone/>
-                      </a:pPr>
-                      <a:r>
-                        <a:rPr lang="en-US" sz="1100" dirty="0">
-                          <a:solidFill>
-                            <a:srgbClr val="000000"/>
-                          </a:solidFill>
-                          <a:latin typeface="Arial" panose="020B0604020202090204" pitchFamily="34" charset="0"/>
-                          <a:ea typeface="Arial" panose="020B0604020202090204" pitchFamily="34" charset="-122"/>
-                          <a:cs typeface="Arial" panose="020B0604020202090204" pitchFamily="34" charset="-120"/>
-                        </a:rPr>
-                        <a:t>112/112</a:t>
-                      </a:r>
-                      <a:endParaRPr lang="en-US" sz="1100" dirty="0">
-                        <a:latin typeface="Arial" panose="020B0604020202090204" pitchFamily="34" charset="0"/>
-                        <a:ea typeface="Arial" panose="020B0604020202090204" pitchFamily="34" charset="0"/>
-                        <a:cs typeface="Arial" panose="020B0604020202090204" pitchFamily="34" charset="0"/>
-                      </a:endParaRPr>
-                    </a:p>
-                  </a:txBody>
-                  <a:tcPr anchor="ctr">
-                    <a:lnL w="6350" cap="flat" cmpd="sng" algn="ctr">
-                      <a:solidFill>
-                        <a:srgbClr val="555555"/>
-                      </a:solidFill>
-                      <a:prstDash val="solid"/>
-                      <a:round/>
-                      <a:headEnd type="none" w="med" len="med"/>
-                      <a:tailEnd type="none" w="med" len="med"/>
-                    </a:lnL>
-                    <a:lnR w="6350" cap="flat" cmpd="sng" algn="ctr">
-                      <a:solidFill>
-                        <a:srgbClr val="555555"/>
-                      </a:solidFill>
-                      <a:prstDash val="solid"/>
-                      <a:round/>
-                      <a:headEnd type="none" w="med" len="med"/>
-                      <a:tailEnd type="none" w="med" len="med"/>
-                    </a:lnR>
-                    <a:lnT w="6350" cap="flat" cmpd="sng" algn="ctr">
-                      <a:solidFill>
-                        <a:srgbClr val="555555"/>
-                      </a:solidFill>
-                      <a:prstDash val="solid"/>
-                      <a:round/>
-                      <a:headEnd type="none" w="med" len="med"/>
-                      <a:tailEnd type="none" w="med" len="med"/>
-                    </a:lnT>
-                    <a:lnB w="6350" cap="flat" cmpd="sng" algn="ctr">
-                      <a:solidFill>
-                        <a:srgbClr val="555555"/>
-                      </a:solidFill>
-                      <a:prstDash val="solid"/>
-                      <a:round/>
-                      <a:headEnd type="none" w="med" len="med"/>
-                      <a:tailEnd type="none" w="med" len="med"/>
-                    </a:lnB>
-                    <a:solidFill>
-                      <a:srgbClr val="F5F5F5"/>
-                    </a:solidFill>
-                  </a:tcPr>
-                </a:tc>
-                <a:tc>
-                  <a:txBody>
-                    <a:bodyPr/>
-                    <a:lstStyle/>
-                    <a:p>
-                      <a:pPr marL="0" indent="0" algn="l">
-                        <a:buNone/>
-                      </a:pPr>
-                      <a:r>
-                        <a:rPr lang="en-US" sz="1100" dirty="0">
-                          <a:solidFill>
-                            <a:srgbClr val="000000"/>
-                          </a:solidFill>
-                          <a:latin typeface="Arial" panose="020B0604020202090204" pitchFamily="34" charset="0"/>
-                          <a:ea typeface="Arial" panose="020B0604020202090204" pitchFamily="34" charset="-122"/>
-                          <a:cs typeface="Arial" panose="020B0604020202090204" pitchFamily="34" charset="-120"/>
-                        </a:rPr>
-                        <a:t>1.09</a:t>
-                      </a:r>
-                      <a:endParaRPr lang="en-US" sz="1100" dirty="0">
-                        <a:latin typeface="Arial" panose="020B0604020202090204" pitchFamily="34" charset="0"/>
-                        <a:ea typeface="Arial" panose="020B0604020202090204" pitchFamily="34" charset="0"/>
-                        <a:cs typeface="Arial" panose="020B0604020202090204" pitchFamily="34" charset="0"/>
-                      </a:endParaRPr>
-                    </a:p>
-                  </a:txBody>
-                  <a:tcPr anchor="ctr">
-                    <a:lnL w="6350" cap="flat" cmpd="sng" algn="ctr">
-                      <a:solidFill>
-                        <a:srgbClr val="555555"/>
-                      </a:solidFill>
-                      <a:prstDash val="solid"/>
-                      <a:round/>
-                      <a:headEnd type="none" w="med" len="med"/>
-                      <a:tailEnd type="none" w="med" len="med"/>
-                    </a:lnL>
-                    <a:lnR w="6350" cap="flat" cmpd="sng" algn="ctr">
-                      <a:solidFill>
-                        <a:srgbClr val="555555"/>
-                      </a:solidFill>
-                      <a:prstDash val="solid"/>
-                      <a:round/>
-                      <a:headEnd type="none" w="med" len="med"/>
-                      <a:tailEnd type="none" w="med" len="med"/>
-                    </a:lnR>
-                    <a:lnT w="6350" cap="flat" cmpd="sng" algn="ctr">
-                      <a:solidFill>
-                        <a:srgbClr val="555555"/>
-                      </a:solidFill>
-                      <a:prstDash val="solid"/>
-                      <a:round/>
-                      <a:headEnd type="none" w="med" len="med"/>
-                      <a:tailEnd type="none" w="med" len="med"/>
-                    </a:lnT>
-                    <a:lnB w="6350" cap="flat" cmpd="sng" algn="ctr">
-                      <a:solidFill>
-                        <a:srgbClr val="555555"/>
-                      </a:solidFill>
-                      <a:prstDash val="solid"/>
-                      <a:round/>
-                      <a:headEnd type="none" w="med" len="med"/>
-                      <a:tailEnd type="none" w="med" len="med"/>
-                    </a:lnB>
-                    <a:solidFill>
-                      <a:srgbClr val="F5F5F5"/>
-                    </a:solidFill>
-                  </a:tcPr>
-                </a:tc>
-                <a:tc>
-                  <a:txBody>
-                    <a:bodyPr/>
-                    <a:lstStyle/>
-                    <a:p>
-                      <a:pPr marL="0" indent="0" algn="l">
-                        <a:buNone/>
-                      </a:pPr>
-                      <a:r>
-                        <a:rPr lang="en-US" sz="1100" dirty="0">
-                          <a:solidFill>
-                            <a:srgbClr val="000000"/>
-                          </a:solidFill>
-                          <a:latin typeface="Arial" panose="020B0604020202090204" pitchFamily="34" charset="0"/>
-                          <a:ea typeface="Arial" panose="020B0604020202090204" pitchFamily="34" charset="-122"/>
-                          <a:cs typeface="Arial" panose="020B0604020202090204" pitchFamily="34" charset="-120"/>
-                        </a:rPr>
-                        <a:t>-0.00025</a:t>
-                      </a:r>
-                      <a:endParaRPr lang="en-US" sz="1100" dirty="0">
-                        <a:latin typeface="Arial" panose="020B0604020202090204" pitchFamily="34" charset="0"/>
-                        <a:ea typeface="Arial" panose="020B0604020202090204" pitchFamily="34" charset="0"/>
-                        <a:cs typeface="Arial" panose="020B0604020202090204" pitchFamily="34" charset="0"/>
-                      </a:endParaRPr>
-                    </a:p>
-                  </a:txBody>
-                  <a:tcPr anchor="ctr">
-                    <a:lnL w="6350" cap="flat" cmpd="sng" algn="ctr">
-                      <a:solidFill>
-                        <a:srgbClr val="555555"/>
-                      </a:solidFill>
-                      <a:prstDash val="solid"/>
-                      <a:round/>
-                      <a:headEnd type="none" w="med" len="med"/>
-                      <a:tailEnd type="none" w="med" len="med"/>
-                    </a:lnL>
-                    <a:lnR w="6350" cap="flat" cmpd="sng" algn="ctr">
-                      <a:solidFill>
-                        <a:srgbClr val="555555"/>
-                      </a:solidFill>
-                      <a:prstDash val="solid"/>
-                      <a:round/>
-                      <a:headEnd type="none" w="med" len="med"/>
-                      <a:tailEnd type="none" w="med" len="med"/>
-                    </a:lnR>
-                    <a:lnT w="6350" cap="flat" cmpd="sng" algn="ctr">
-                      <a:solidFill>
-                        <a:srgbClr val="555555"/>
-                      </a:solidFill>
-                      <a:prstDash val="solid"/>
-                      <a:round/>
-                      <a:headEnd type="none" w="med" len="med"/>
-                      <a:tailEnd type="none" w="med" len="med"/>
-                    </a:lnT>
-                    <a:lnB w="6350" cap="flat" cmpd="sng" algn="ctr">
-                      <a:solidFill>
-                        <a:srgbClr val="555555"/>
-                      </a:solidFill>
-                      <a:prstDash val="solid"/>
-                      <a:round/>
-                      <a:headEnd type="none" w="med" len="med"/>
-                      <a:tailEnd type="none" w="med" len="med"/>
-                    </a:lnB>
-                    <a:solidFill>
-                      <a:srgbClr val="F5F5F5"/>
-                    </a:solidFill>
-                  </a:tcPr>
-                </a:tc>
-                <a:tc>
-                  <a:txBody>
-                    <a:bodyPr/>
-                    <a:lstStyle/>
-                    <a:p>
-                      <a:pPr marL="0" indent="0" algn="l">
-                        <a:buNone/>
-                      </a:pPr>
-                      <a:r>
-                        <a:rPr lang="en-US" sz="1100" dirty="0">
-                          <a:solidFill>
-                            <a:srgbClr val="000000"/>
-                          </a:solidFill>
-                          <a:latin typeface="Arial" panose="020B0604020202090204" pitchFamily="34" charset="0"/>
-                          <a:ea typeface="Arial" panose="020B0604020202090204" pitchFamily="34" charset="-122"/>
-                          <a:cs typeface="Arial" panose="020B0604020202090204" pitchFamily="34" charset="-120"/>
-                        </a:rPr>
-                        <a:t>O endpoint (frame 1 source)</a:t>
-                      </a:r>
-                      <a:endParaRPr lang="en-US" sz="1100" dirty="0">
-                        <a:latin typeface="Arial" panose="020B0604020202090204" pitchFamily="34" charset="0"/>
-                        <a:ea typeface="Arial" panose="020B0604020202090204" pitchFamily="34" charset="0"/>
-                        <a:cs typeface="Arial" panose="020B0604020202090204" pitchFamily="34" charset="0"/>
-                      </a:endParaRPr>
-                    </a:p>
-                  </a:txBody>
-                  <a:tcPr anchor="ctr">
-                    <a:lnL w="6350" cap="flat" cmpd="sng" algn="ctr">
-                      <a:solidFill>
-                        <a:srgbClr val="555555"/>
-                      </a:solidFill>
-                      <a:prstDash val="solid"/>
-                      <a:round/>
-                      <a:headEnd type="none" w="med" len="med"/>
-                      <a:tailEnd type="none" w="med" len="med"/>
-                    </a:lnL>
-                    <a:lnR w="6350" cap="flat" cmpd="sng" algn="ctr">
-                      <a:solidFill>
-                        <a:srgbClr val="555555"/>
-                      </a:solidFill>
-                      <a:prstDash val="solid"/>
-                      <a:round/>
-                      <a:headEnd type="none" w="med" len="med"/>
-                      <a:tailEnd type="none" w="med" len="med"/>
-                    </a:lnR>
-                    <a:lnT w="6350" cap="flat" cmpd="sng" algn="ctr">
-                      <a:solidFill>
-                        <a:srgbClr val="555555"/>
-                      </a:solidFill>
-                      <a:prstDash val="solid"/>
-                      <a:round/>
-                      <a:headEnd type="none" w="med" len="med"/>
-                      <a:tailEnd type="none" w="med" len="med"/>
-                    </a:lnT>
-                    <a:lnB w="6350" cap="flat" cmpd="sng" algn="ctr">
-                      <a:solidFill>
-                        <a:srgbClr val="555555"/>
-                      </a:solidFill>
-                      <a:prstDash val="solid"/>
-                      <a:round/>
-                      <a:headEnd type="none" w="med" len="med"/>
-                      <a:tailEnd type="none" w="med" len="med"/>
-                    </a:lnB>
-                    <a:solidFill>
-                      <a:srgbClr val="F5F5F5"/>
-                    </a:solidFill>
-                  </a:tcPr>
-                </a:tc>
-              </a:tr>
-              <a:tr h="274320">
-                <a:tc>
-                  <a:txBody>
-                    <a:bodyPr/>
-                    <a:lstStyle/>
-                    <a:p>
-                      <a:pPr marL="0" indent="0" algn="l">
-                        <a:buNone/>
-                      </a:pPr>
-                      <a:r>
-                        <a:rPr lang="en-US" sz="1100" dirty="0">
-                          <a:solidFill>
-                            <a:srgbClr val="000000"/>
-                          </a:solidFill>
-                          <a:latin typeface="Arial" panose="020B0604020202090204" pitchFamily="34" charset="0"/>
-                          <a:ea typeface="Arial" panose="020B0604020202090204" pitchFamily="34" charset="-122"/>
-                          <a:cs typeface="Arial" panose="020B0604020202090204" pitchFamily="34" charset="-120"/>
-                        </a:rPr>
-                        <a:t>3CEP</a:t>
-                      </a:r>
-                      <a:endParaRPr lang="en-US" sz="1100" dirty="0">
-                        <a:latin typeface="Arial" panose="020B0604020202090204" pitchFamily="34" charset="0"/>
-                        <a:ea typeface="Arial" panose="020B0604020202090204" pitchFamily="34" charset="0"/>
-                        <a:cs typeface="Arial" panose="020B0604020202090204" pitchFamily="34" charset="0"/>
-                      </a:endParaRPr>
-                    </a:p>
-                  </a:txBody>
-                  <a:tcPr anchor="ctr">
-                    <a:lnL w="6350" cap="flat" cmpd="sng" algn="ctr">
-                      <a:solidFill>
-                        <a:srgbClr val="555555"/>
-                      </a:solidFill>
-                      <a:prstDash val="solid"/>
-                      <a:round/>
-                      <a:headEnd type="none" w="med" len="med"/>
-                      <a:tailEnd type="none" w="med" len="med"/>
-                    </a:lnL>
-                    <a:lnR w="6350" cap="flat" cmpd="sng" algn="ctr">
-                      <a:solidFill>
-                        <a:srgbClr val="555555"/>
-                      </a:solidFill>
-                      <a:prstDash val="solid"/>
-                      <a:round/>
-                      <a:headEnd type="none" w="med" len="med"/>
-                      <a:tailEnd type="none" w="med" len="med"/>
-                    </a:lnR>
-                    <a:lnT w="6350" cap="flat" cmpd="sng" algn="ctr">
-                      <a:solidFill>
-                        <a:srgbClr val="555555"/>
-                      </a:solidFill>
-                      <a:prstDash val="solid"/>
-                      <a:round/>
-                      <a:headEnd type="none" w="med" len="med"/>
-                      <a:tailEnd type="none" w="med" len="med"/>
-                    </a:lnT>
-                    <a:lnB w="6350" cap="flat" cmpd="sng" algn="ctr">
-                      <a:solidFill>
-                        <a:srgbClr val="555555"/>
-                      </a:solidFill>
-                      <a:prstDash val="solid"/>
-                      <a:round/>
-                      <a:headEnd type="none" w="med" len="med"/>
-                      <a:tailEnd type="none" w="med" len="med"/>
-                    </a:lnB>
-                    <a:solidFill>
-                      <a:srgbClr val="F5F5F5"/>
-                    </a:solidFill>
-                  </a:tcPr>
-                </a:tc>
-                <a:tc>
-                  <a:txBody>
-                    <a:bodyPr/>
-                    <a:lstStyle/>
-                    <a:p>
-                      <a:pPr marL="0" indent="0" algn="l">
-                        <a:buNone/>
-                      </a:pPr>
-                      <a:r>
-                        <a:rPr lang="en-US" sz="1100" dirty="0">
-                          <a:solidFill>
-                            <a:srgbClr val="000000"/>
-                          </a:solidFill>
-                          <a:latin typeface="Arial" panose="020B0604020202090204" pitchFamily="34" charset="0"/>
-                          <a:ea typeface="Arial" panose="020B0604020202090204" pitchFamily="34" charset="-122"/>
-                          <a:cs typeface="Arial" panose="020B0604020202090204" pitchFamily="34" charset="-120"/>
-                        </a:rPr>
-                        <a:t>B</a:t>
-                      </a:r>
-                      <a:endParaRPr lang="en-US" sz="1100" dirty="0">
-                        <a:latin typeface="Arial" panose="020B0604020202090204" pitchFamily="34" charset="0"/>
-                        <a:ea typeface="Arial" panose="020B0604020202090204" pitchFamily="34" charset="0"/>
-                        <a:cs typeface="Arial" panose="020B0604020202090204" pitchFamily="34" charset="0"/>
-                      </a:endParaRPr>
-                    </a:p>
-                  </a:txBody>
-                  <a:tcPr anchor="ctr">
-                    <a:lnL w="6350" cap="flat" cmpd="sng" algn="ctr">
-                      <a:solidFill>
-                        <a:srgbClr val="555555"/>
-                      </a:solidFill>
-                      <a:prstDash val="solid"/>
-                      <a:round/>
-                      <a:headEnd type="none" w="med" len="med"/>
-                      <a:tailEnd type="none" w="med" len="med"/>
-                    </a:lnL>
-                    <a:lnR w="6350" cap="flat" cmpd="sng" algn="ctr">
-                      <a:solidFill>
-                        <a:srgbClr val="555555"/>
-                      </a:solidFill>
-                      <a:prstDash val="solid"/>
-                      <a:round/>
-                      <a:headEnd type="none" w="med" len="med"/>
-                      <a:tailEnd type="none" w="med" len="med"/>
-                    </a:lnR>
-                    <a:lnT w="6350" cap="flat" cmpd="sng" algn="ctr">
-                      <a:solidFill>
-                        <a:srgbClr val="555555"/>
-                      </a:solidFill>
-                      <a:prstDash val="solid"/>
-                      <a:round/>
-                      <a:headEnd type="none" w="med" len="med"/>
-                      <a:tailEnd type="none" w="med" len="med"/>
-                    </a:lnT>
-                    <a:lnB w="6350" cap="flat" cmpd="sng" algn="ctr">
-                      <a:solidFill>
-                        <a:srgbClr val="555555"/>
-                      </a:solidFill>
-                      <a:prstDash val="solid"/>
-                      <a:round/>
-                      <a:headEnd type="none" w="med" len="med"/>
-                      <a:tailEnd type="none" w="med" len="med"/>
-                    </a:lnB>
-                    <a:solidFill>
-                      <a:srgbClr val="F5F5F5"/>
-                    </a:solidFill>
-                  </a:tcPr>
-                </a:tc>
-                <a:tc>
-                  <a:txBody>
-                    <a:bodyPr/>
-                    <a:lstStyle/>
-                    <a:p>
-                      <a:pPr marL="0" indent="0" algn="l">
-                        <a:buNone/>
-                      </a:pPr>
-                      <a:r>
-                        <a:rPr lang="en-US" sz="1100" dirty="0">
-                          <a:solidFill>
-                            <a:srgbClr val="000000"/>
-                          </a:solidFill>
-                          <a:latin typeface="Arial" panose="020B0604020202090204" pitchFamily="34" charset="0"/>
-                          <a:ea typeface="Arial" panose="020B0604020202090204" pitchFamily="34" charset="-122"/>
-                          <a:cs typeface="Arial" panose="020B0604020202090204" pitchFamily="34" charset="-120"/>
-                        </a:rPr>
-                        <a:t>112/112</a:t>
-                      </a:r>
-                      <a:endParaRPr lang="en-US" sz="1100" dirty="0">
-                        <a:latin typeface="Arial" panose="020B0604020202090204" pitchFamily="34" charset="0"/>
-                        <a:ea typeface="Arial" panose="020B0604020202090204" pitchFamily="34" charset="0"/>
-                        <a:cs typeface="Arial" panose="020B0604020202090204" pitchFamily="34" charset="0"/>
-                      </a:endParaRPr>
-                    </a:p>
-                  </a:txBody>
-                  <a:tcPr anchor="ctr">
-                    <a:lnL w="6350" cap="flat" cmpd="sng" algn="ctr">
-                      <a:solidFill>
-                        <a:srgbClr val="555555"/>
-                      </a:solidFill>
-                      <a:prstDash val="solid"/>
-                      <a:round/>
-                      <a:headEnd type="none" w="med" len="med"/>
-                      <a:tailEnd type="none" w="med" len="med"/>
-                    </a:lnL>
-                    <a:lnR w="6350" cap="flat" cmpd="sng" algn="ctr">
-                      <a:solidFill>
-                        <a:srgbClr val="555555"/>
-                      </a:solidFill>
-                      <a:prstDash val="solid"/>
-                      <a:round/>
-                      <a:headEnd type="none" w="med" len="med"/>
-                      <a:tailEnd type="none" w="med" len="med"/>
-                    </a:lnR>
-                    <a:lnT w="6350" cap="flat" cmpd="sng" algn="ctr">
-                      <a:solidFill>
-                        <a:srgbClr val="555555"/>
-                      </a:solidFill>
-                      <a:prstDash val="solid"/>
-                      <a:round/>
-                      <a:headEnd type="none" w="med" len="med"/>
-                      <a:tailEnd type="none" w="med" len="med"/>
-                    </a:lnT>
-                    <a:lnB w="6350" cap="flat" cmpd="sng" algn="ctr">
-                      <a:solidFill>
-                        <a:srgbClr val="555555"/>
-                      </a:solidFill>
-                      <a:prstDash val="solid"/>
-                      <a:round/>
-                      <a:headEnd type="none" w="med" len="med"/>
-                      <a:tailEnd type="none" w="med" len="med"/>
-                    </a:lnB>
-                    <a:solidFill>
-                      <a:srgbClr val="F5F5F5"/>
-                    </a:solidFill>
-                  </a:tcPr>
-                </a:tc>
-                <a:tc>
-                  <a:txBody>
-                    <a:bodyPr/>
-                    <a:lstStyle/>
-                    <a:p>
-                      <a:pPr marL="0" indent="0" algn="l">
-                        <a:buNone/>
-                      </a:pPr>
-                      <a:r>
-                        <a:rPr lang="en-US" sz="1100" dirty="0">
-                          <a:solidFill>
-                            <a:srgbClr val="000000"/>
-                          </a:solidFill>
-                          <a:latin typeface="Arial" panose="020B0604020202090204" pitchFamily="34" charset="0"/>
-                          <a:ea typeface="Arial" panose="020B0604020202090204" pitchFamily="34" charset="-122"/>
-                          <a:cs typeface="Arial" panose="020B0604020202090204" pitchFamily="34" charset="-120"/>
-                        </a:rPr>
-                        <a:t>14.91</a:t>
-                      </a:r>
-                      <a:endParaRPr lang="en-US" sz="1100" dirty="0">
-                        <a:latin typeface="Arial" panose="020B0604020202090204" pitchFamily="34" charset="0"/>
-                        <a:ea typeface="Arial" panose="020B0604020202090204" pitchFamily="34" charset="0"/>
-                        <a:cs typeface="Arial" panose="020B0604020202090204" pitchFamily="34" charset="0"/>
-                      </a:endParaRPr>
-                    </a:p>
-                  </a:txBody>
-                  <a:tcPr anchor="ctr">
-                    <a:lnL w="6350" cap="flat" cmpd="sng" algn="ctr">
-                      <a:solidFill>
-                        <a:srgbClr val="555555"/>
-                      </a:solidFill>
-                      <a:prstDash val="solid"/>
-                      <a:round/>
-                      <a:headEnd type="none" w="med" len="med"/>
-                      <a:tailEnd type="none" w="med" len="med"/>
-                    </a:lnL>
-                    <a:lnR w="6350" cap="flat" cmpd="sng" algn="ctr">
-                      <a:solidFill>
-                        <a:srgbClr val="555555"/>
-                      </a:solidFill>
-                      <a:prstDash val="solid"/>
-                      <a:round/>
-                      <a:headEnd type="none" w="med" len="med"/>
-                      <a:tailEnd type="none" w="med" len="med"/>
-                    </a:lnR>
-                    <a:lnT w="6350" cap="flat" cmpd="sng" algn="ctr">
-                      <a:solidFill>
-                        <a:srgbClr val="555555"/>
-                      </a:solidFill>
-                      <a:prstDash val="solid"/>
-                      <a:round/>
-                      <a:headEnd type="none" w="med" len="med"/>
-                      <a:tailEnd type="none" w="med" len="med"/>
-                    </a:lnT>
-                    <a:lnB w="6350" cap="flat" cmpd="sng" algn="ctr">
-                      <a:solidFill>
-                        <a:srgbClr val="555555"/>
-                      </a:solidFill>
-                      <a:prstDash val="solid"/>
-                      <a:round/>
-                      <a:headEnd type="none" w="med" len="med"/>
-                      <a:tailEnd type="none" w="med" len="med"/>
-                    </a:lnB>
-                    <a:solidFill>
-                      <a:srgbClr val="F5F5F5"/>
-                    </a:solidFill>
-                  </a:tcPr>
-                </a:tc>
-                <a:tc>
-                  <a:txBody>
-                    <a:bodyPr/>
-                    <a:lstStyle/>
-                    <a:p>
-                      <a:pPr marL="0" indent="0" algn="l">
-                        <a:buNone/>
-                      </a:pPr>
-                      <a:r>
-                        <a:rPr lang="en-US" sz="1100" dirty="0">
-                          <a:solidFill>
-                            <a:srgbClr val="000000"/>
-                          </a:solidFill>
-                          <a:latin typeface="Arial" panose="020B0604020202090204" pitchFamily="34" charset="0"/>
-                          <a:ea typeface="Arial" panose="020B0604020202090204" pitchFamily="34" charset="-122"/>
-                          <a:cs typeface="Arial" panose="020B0604020202090204" pitchFamily="34" charset="-120"/>
-                        </a:rPr>
-                        <a:t>-0.00025</a:t>
-                      </a:r>
-                      <a:endParaRPr lang="en-US" sz="1100" dirty="0">
-                        <a:latin typeface="Arial" panose="020B0604020202090204" pitchFamily="34" charset="0"/>
-                        <a:ea typeface="Arial" panose="020B0604020202090204" pitchFamily="34" charset="0"/>
-                        <a:cs typeface="Arial" panose="020B0604020202090204" pitchFamily="34" charset="0"/>
-                      </a:endParaRPr>
-                    </a:p>
-                  </a:txBody>
-                  <a:tcPr anchor="ctr">
-                    <a:lnL w="6350" cap="flat" cmpd="sng" algn="ctr">
-                      <a:solidFill>
-                        <a:srgbClr val="555555"/>
-                      </a:solidFill>
-                      <a:prstDash val="solid"/>
-                      <a:round/>
-                      <a:headEnd type="none" w="med" len="med"/>
-                      <a:tailEnd type="none" w="med" len="med"/>
-                    </a:lnL>
-                    <a:lnR w="6350" cap="flat" cmpd="sng" algn="ctr">
-                      <a:solidFill>
-                        <a:srgbClr val="555555"/>
-                      </a:solidFill>
-                      <a:prstDash val="solid"/>
-                      <a:round/>
-                      <a:headEnd type="none" w="med" len="med"/>
-                      <a:tailEnd type="none" w="med" len="med"/>
-                    </a:lnR>
-                    <a:lnT w="6350" cap="flat" cmpd="sng" algn="ctr">
-                      <a:solidFill>
-                        <a:srgbClr val="555555"/>
-                      </a:solidFill>
-                      <a:prstDash val="solid"/>
-                      <a:round/>
-                      <a:headEnd type="none" w="med" len="med"/>
-                      <a:tailEnd type="none" w="med" len="med"/>
-                    </a:lnT>
-                    <a:lnB w="6350" cap="flat" cmpd="sng" algn="ctr">
-                      <a:solidFill>
-                        <a:srgbClr val="555555"/>
-                      </a:solidFill>
-                      <a:prstDash val="solid"/>
-                      <a:round/>
-                      <a:headEnd type="none" w="med" len="med"/>
-                      <a:tailEnd type="none" w="med" len="med"/>
-                    </a:lnB>
-                    <a:solidFill>
-                      <a:srgbClr val="F5F5F5"/>
-                    </a:solidFill>
-                  </a:tcPr>
-                </a:tc>
-                <a:tc>
-                  <a:txBody>
-                    <a:bodyPr/>
-                    <a:lstStyle/>
-                    <a:p>
-                      <a:pPr marL="0" indent="0" algn="l">
-                        <a:buNone/>
-                      </a:pPr>
-                      <a:r>
-                        <a:rPr lang="en-US" sz="1100" dirty="0">
-                          <a:solidFill>
-                            <a:srgbClr val="000000"/>
-                          </a:solidFill>
-                          <a:latin typeface="Arial" panose="020B0604020202090204" pitchFamily="34" charset="0"/>
-                          <a:ea typeface="Arial" panose="020B0604020202090204" pitchFamily="34" charset="-122"/>
-                          <a:cs typeface="Arial" panose="020B0604020202090204" pitchFamily="34" charset="-120"/>
-                        </a:rPr>
-                        <a:t>C endpoint (frame 15 source)</a:t>
-                      </a:r>
-                      <a:endParaRPr lang="en-US" sz="1100" dirty="0">
-                        <a:latin typeface="Arial" panose="020B0604020202090204" pitchFamily="34" charset="0"/>
-                        <a:ea typeface="Arial" panose="020B0604020202090204" pitchFamily="34" charset="0"/>
-                        <a:cs typeface="Arial" panose="020B0604020202090204" pitchFamily="34" charset="0"/>
-                      </a:endParaRPr>
-                    </a:p>
-                  </a:txBody>
-                  <a:tcPr anchor="ctr">
-                    <a:lnL w="6350" cap="flat" cmpd="sng" algn="ctr">
-                      <a:solidFill>
-                        <a:srgbClr val="555555"/>
-                      </a:solidFill>
-                      <a:prstDash val="solid"/>
-                      <a:round/>
-                      <a:headEnd type="none" w="med" len="med"/>
-                      <a:tailEnd type="none" w="med" len="med"/>
-                    </a:lnL>
-                    <a:lnR w="6350" cap="flat" cmpd="sng" algn="ctr">
-                      <a:solidFill>
-                        <a:srgbClr val="555555"/>
-                      </a:solidFill>
-                      <a:prstDash val="solid"/>
-                      <a:round/>
-                      <a:headEnd type="none" w="med" len="med"/>
-                      <a:tailEnd type="none" w="med" len="med"/>
-                    </a:lnR>
-                    <a:lnT w="6350" cap="flat" cmpd="sng" algn="ctr">
-                      <a:solidFill>
-                        <a:srgbClr val="555555"/>
-                      </a:solidFill>
-                      <a:prstDash val="solid"/>
-                      <a:round/>
-                      <a:headEnd type="none" w="med" len="med"/>
-                      <a:tailEnd type="none" w="med" len="med"/>
-                    </a:lnT>
-                    <a:lnB w="6350" cap="flat" cmpd="sng" algn="ctr">
-                      <a:solidFill>
-                        <a:srgbClr val="555555"/>
-                      </a:solidFill>
-                      <a:prstDash val="solid"/>
-                      <a:round/>
-                      <a:headEnd type="none" w="med" len="med"/>
-                      <a:tailEnd type="none" w="med" len="med"/>
-                    </a:lnB>
-                    <a:solidFill>
-                      <a:srgbClr val="F5F5F5"/>
-                    </a:solidFill>
-                  </a:tcPr>
-                </a:tc>
-              </a:tr>
-              <a:tr h="274320">
-                <a:tc>
-                  <a:txBody>
-                    <a:bodyPr/>
-                    <a:lstStyle/>
-                    <a:p>
-                      <a:pPr marL="0" indent="0" algn="l">
-                        <a:buNone/>
-                      </a:pPr>
-                      <a:r>
-                        <a:rPr lang="en-US" sz="1100" dirty="0">
-                          <a:solidFill>
-                            <a:srgbClr val="000000"/>
-                          </a:solidFill>
-                          <a:latin typeface="Arial" panose="020B0604020202090204" pitchFamily="34" charset="0"/>
-                          <a:ea typeface="Arial" panose="020B0604020202090204" pitchFamily="34" charset="-122"/>
-                          <a:cs typeface="Arial" panose="020B0604020202090204" pitchFamily="34" charset="-120"/>
-                        </a:rPr>
-                        <a:t>4HPX</a:t>
-                      </a:r>
-                      <a:endParaRPr lang="en-US" sz="1100" dirty="0">
-                        <a:latin typeface="Arial" panose="020B0604020202090204" pitchFamily="34" charset="0"/>
-                        <a:ea typeface="Arial" panose="020B0604020202090204" pitchFamily="34" charset="0"/>
-                        <a:cs typeface="Arial" panose="020B0604020202090204" pitchFamily="34" charset="0"/>
-                      </a:endParaRPr>
-                    </a:p>
-                  </a:txBody>
-                  <a:tcPr anchor="ctr">
-                    <a:lnL w="6350" cap="flat" cmpd="sng" algn="ctr">
-                      <a:solidFill>
-                        <a:srgbClr val="555555"/>
-                      </a:solidFill>
-                      <a:prstDash val="solid"/>
-                      <a:round/>
-                      <a:headEnd type="none" w="med" len="med"/>
-                      <a:tailEnd type="none" w="med" len="med"/>
-                    </a:lnL>
-                    <a:lnR w="6350" cap="flat" cmpd="sng" algn="ctr">
-                      <a:solidFill>
-                        <a:srgbClr val="555555"/>
-                      </a:solidFill>
-                      <a:prstDash val="solid"/>
-                      <a:round/>
-                      <a:headEnd type="none" w="med" len="med"/>
-                      <a:tailEnd type="none" w="med" len="med"/>
-                    </a:lnR>
-                    <a:lnT w="6350" cap="flat" cmpd="sng" algn="ctr">
-                      <a:solidFill>
-                        <a:srgbClr val="555555"/>
-                      </a:solidFill>
-                      <a:prstDash val="solid"/>
-                      <a:round/>
-                      <a:headEnd type="none" w="med" len="med"/>
-                      <a:tailEnd type="none" w="med" len="med"/>
-                    </a:lnT>
-                    <a:lnB w="6350" cap="flat" cmpd="sng" algn="ctr">
-                      <a:solidFill>
-                        <a:srgbClr val="555555"/>
-                      </a:solidFill>
-                      <a:prstDash val="solid"/>
-                      <a:round/>
-                      <a:headEnd type="none" w="med" len="med"/>
-                      <a:tailEnd type="none" w="med" len="med"/>
-                    </a:lnB>
-                    <a:solidFill>
-                      <a:srgbClr val="F5F5F5"/>
-                    </a:solidFill>
-                  </a:tcPr>
-                </a:tc>
-                <a:tc>
-                  <a:txBody>
-                    <a:bodyPr/>
-                    <a:lstStyle/>
-                    <a:p>
-                      <a:pPr marL="0" indent="0" algn="l">
-                        <a:buNone/>
-                      </a:pPr>
-                      <a:r>
-                        <a:rPr lang="en-US" sz="1100" dirty="0">
-                          <a:solidFill>
-                            <a:srgbClr val="000000"/>
-                          </a:solidFill>
-                          <a:latin typeface="Arial" panose="020B0604020202090204" pitchFamily="34" charset="0"/>
-                          <a:ea typeface="Arial" panose="020B0604020202090204" pitchFamily="34" charset="-122"/>
-                          <a:cs typeface="Arial" panose="020B0604020202090204" pitchFamily="34" charset="-120"/>
-                        </a:rPr>
-                        <a:t>B</a:t>
-                      </a:r>
-                      <a:endParaRPr lang="en-US" sz="1100" dirty="0">
-                        <a:latin typeface="Arial" panose="020B0604020202090204" pitchFamily="34" charset="0"/>
-                        <a:ea typeface="Arial" panose="020B0604020202090204" pitchFamily="34" charset="0"/>
-                        <a:cs typeface="Arial" panose="020B0604020202090204" pitchFamily="34" charset="0"/>
-                      </a:endParaRPr>
-                    </a:p>
-                  </a:txBody>
-                  <a:tcPr anchor="ctr">
-                    <a:lnL w="6350" cap="flat" cmpd="sng" algn="ctr">
-                      <a:solidFill>
-                        <a:srgbClr val="555555"/>
-                      </a:solidFill>
-                      <a:prstDash val="solid"/>
-                      <a:round/>
-                      <a:headEnd type="none" w="med" len="med"/>
-                      <a:tailEnd type="none" w="med" len="med"/>
-                    </a:lnL>
-                    <a:lnR w="6350" cap="flat" cmpd="sng" algn="ctr">
-                      <a:solidFill>
-                        <a:srgbClr val="555555"/>
-                      </a:solidFill>
-                      <a:prstDash val="solid"/>
-                      <a:round/>
-                      <a:headEnd type="none" w="med" len="med"/>
-                      <a:tailEnd type="none" w="med" len="med"/>
-                    </a:lnR>
-                    <a:lnT w="6350" cap="flat" cmpd="sng" algn="ctr">
-                      <a:solidFill>
-                        <a:srgbClr val="555555"/>
-                      </a:solidFill>
-                      <a:prstDash val="solid"/>
-                      <a:round/>
-                      <a:headEnd type="none" w="med" len="med"/>
-                      <a:tailEnd type="none" w="med" len="med"/>
-                    </a:lnT>
-                    <a:lnB w="6350" cap="flat" cmpd="sng" algn="ctr">
-                      <a:solidFill>
-                        <a:srgbClr val="555555"/>
-                      </a:solidFill>
-                      <a:prstDash val="solid"/>
-                      <a:round/>
-                      <a:headEnd type="none" w="med" len="med"/>
-                      <a:tailEnd type="none" w="med" len="med"/>
-                    </a:lnB>
-                    <a:solidFill>
-                      <a:srgbClr val="F5F5F5"/>
-                    </a:solidFill>
-                  </a:tcPr>
-                </a:tc>
-                <a:tc>
-                  <a:txBody>
-                    <a:bodyPr/>
-                    <a:lstStyle/>
-                    <a:p>
-                      <a:pPr marL="0" indent="0" algn="l">
-                        <a:buNone/>
-                      </a:pPr>
-                      <a:r>
-                        <a:rPr lang="en-US" sz="1100" dirty="0">
-                          <a:solidFill>
-                            <a:srgbClr val="000000"/>
-                          </a:solidFill>
-                          <a:latin typeface="Arial" panose="020B0604020202090204" pitchFamily="34" charset="0"/>
-                          <a:ea typeface="Arial" panose="020B0604020202090204" pitchFamily="34" charset="-122"/>
-                          <a:cs typeface="Arial" panose="020B0604020202090204" pitchFamily="34" charset="-120"/>
-                        </a:rPr>
-                        <a:t>112/112</a:t>
-                      </a:r>
-                      <a:endParaRPr lang="en-US" sz="1100" dirty="0">
-                        <a:latin typeface="Arial" panose="020B0604020202090204" pitchFamily="34" charset="0"/>
-                        <a:ea typeface="Arial" panose="020B0604020202090204" pitchFamily="34" charset="0"/>
-                        <a:cs typeface="Arial" panose="020B0604020202090204" pitchFamily="34" charset="0"/>
-                      </a:endParaRPr>
-                    </a:p>
-                  </a:txBody>
-                  <a:tcPr anchor="ctr">
-                    <a:lnL w="6350" cap="flat" cmpd="sng" algn="ctr">
-                      <a:solidFill>
-                        <a:srgbClr val="555555"/>
-                      </a:solidFill>
-                      <a:prstDash val="solid"/>
-                      <a:round/>
-                      <a:headEnd type="none" w="med" len="med"/>
-                      <a:tailEnd type="none" w="med" len="med"/>
-                    </a:lnL>
-                    <a:lnR w="6350" cap="flat" cmpd="sng" algn="ctr">
-                      <a:solidFill>
-                        <a:srgbClr val="555555"/>
-                      </a:solidFill>
-                      <a:prstDash val="solid"/>
-                      <a:round/>
-                      <a:headEnd type="none" w="med" len="med"/>
-                      <a:tailEnd type="none" w="med" len="med"/>
-                    </a:lnR>
-                    <a:lnT w="6350" cap="flat" cmpd="sng" algn="ctr">
-                      <a:solidFill>
-                        <a:srgbClr val="555555"/>
-                      </a:solidFill>
-                      <a:prstDash val="solid"/>
-                      <a:round/>
-                      <a:headEnd type="none" w="med" len="med"/>
-                      <a:tailEnd type="none" w="med" len="med"/>
-                    </a:lnT>
-                    <a:lnB w="6350" cap="flat" cmpd="sng" algn="ctr">
-                      <a:solidFill>
-                        <a:srgbClr val="555555"/>
-                      </a:solidFill>
-                      <a:prstDash val="solid"/>
-                      <a:round/>
-                      <a:headEnd type="none" w="med" len="med"/>
-                      <a:tailEnd type="none" w="med" len="med"/>
-                    </a:lnB>
-                    <a:solidFill>
-                      <a:srgbClr val="F5F5F5"/>
-                    </a:solidFill>
-                  </a:tcPr>
-                </a:tc>
-                <a:tc>
-                  <a:txBody>
-                    <a:bodyPr/>
-                    <a:lstStyle/>
-                    <a:p>
-                      <a:pPr marL="0" indent="0" algn="l">
-                        <a:buNone/>
-                      </a:pPr>
-                      <a:r>
-                        <a:rPr lang="en-US" sz="1100" dirty="0">
-                          <a:solidFill>
-                            <a:srgbClr val="000000"/>
-                          </a:solidFill>
-                          <a:latin typeface="Arial" panose="020B0604020202090204" pitchFamily="34" charset="0"/>
-                          <a:ea typeface="Arial" panose="020B0604020202090204" pitchFamily="34" charset="-122"/>
-                          <a:cs typeface="Arial" panose="020B0604020202090204" pitchFamily="34" charset="-120"/>
-                        </a:rPr>
-                        <a:t>14.91</a:t>
-                      </a:r>
-                      <a:endParaRPr lang="en-US" sz="1100" dirty="0">
-                        <a:latin typeface="Arial" panose="020B0604020202090204" pitchFamily="34" charset="0"/>
-                        <a:ea typeface="Arial" panose="020B0604020202090204" pitchFamily="34" charset="0"/>
-                        <a:cs typeface="Arial" panose="020B0604020202090204" pitchFamily="34" charset="0"/>
-                      </a:endParaRPr>
-                    </a:p>
-                  </a:txBody>
-                  <a:tcPr anchor="ctr">
-                    <a:lnL w="6350" cap="flat" cmpd="sng" algn="ctr">
-                      <a:solidFill>
-                        <a:srgbClr val="555555"/>
-                      </a:solidFill>
-                      <a:prstDash val="solid"/>
-                      <a:round/>
-                      <a:headEnd type="none" w="med" len="med"/>
-                      <a:tailEnd type="none" w="med" len="med"/>
-                    </a:lnL>
-                    <a:lnR w="6350" cap="flat" cmpd="sng" algn="ctr">
-                      <a:solidFill>
-                        <a:srgbClr val="555555"/>
-                      </a:solidFill>
-                      <a:prstDash val="solid"/>
-                      <a:round/>
-                      <a:headEnd type="none" w="med" len="med"/>
-                      <a:tailEnd type="none" w="med" len="med"/>
-                    </a:lnR>
-                    <a:lnT w="6350" cap="flat" cmpd="sng" algn="ctr">
-                      <a:solidFill>
-                        <a:srgbClr val="555555"/>
-                      </a:solidFill>
-                      <a:prstDash val="solid"/>
-                      <a:round/>
-                      <a:headEnd type="none" w="med" len="med"/>
-                      <a:tailEnd type="none" w="med" len="med"/>
-                    </a:lnT>
-                    <a:lnB w="6350" cap="flat" cmpd="sng" algn="ctr">
-                      <a:solidFill>
-                        <a:srgbClr val="555555"/>
-                      </a:solidFill>
-                      <a:prstDash val="solid"/>
-                      <a:round/>
-                      <a:headEnd type="none" w="med" len="med"/>
-                      <a:tailEnd type="none" w="med" len="med"/>
-                    </a:lnB>
-                    <a:solidFill>
-                      <a:srgbClr val="F5F5F5"/>
-                    </a:solidFill>
-                  </a:tcPr>
-                </a:tc>
-                <a:tc>
-                  <a:txBody>
-                    <a:bodyPr/>
-                    <a:lstStyle/>
-                    <a:p>
-                      <a:pPr marL="0" indent="0" algn="l">
-                        <a:buNone/>
-                      </a:pPr>
-                      <a:r>
-                        <a:rPr lang="en-US" sz="1100" dirty="0">
-                          <a:solidFill>
-                            <a:srgbClr val="000000"/>
-                          </a:solidFill>
-                          <a:latin typeface="Arial" panose="020B0604020202090204" pitchFamily="34" charset="0"/>
-                          <a:ea typeface="Arial" panose="020B0604020202090204" pitchFamily="34" charset="-122"/>
-                          <a:cs typeface="Arial" panose="020B0604020202090204" pitchFamily="34" charset="-120"/>
-                        </a:rPr>
-                        <a:t>-0.00005</a:t>
-                      </a:r>
-                      <a:endParaRPr lang="en-US" sz="1100" dirty="0">
-                        <a:latin typeface="Arial" panose="020B0604020202090204" pitchFamily="34" charset="0"/>
-                        <a:ea typeface="Arial" panose="020B0604020202090204" pitchFamily="34" charset="0"/>
-                        <a:cs typeface="Arial" panose="020B0604020202090204" pitchFamily="34" charset="0"/>
-                      </a:endParaRPr>
-                    </a:p>
-                  </a:txBody>
-                  <a:tcPr anchor="ctr">
-                    <a:lnL w="6350" cap="flat" cmpd="sng" algn="ctr">
-                      <a:solidFill>
-                        <a:srgbClr val="555555"/>
-                      </a:solidFill>
-                      <a:prstDash val="solid"/>
-                      <a:round/>
-                      <a:headEnd type="none" w="med" len="med"/>
-                      <a:tailEnd type="none" w="med" len="med"/>
-                    </a:lnL>
-                    <a:lnR w="6350" cap="flat" cmpd="sng" algn="ctr">
-                      <a:solidFill>
-                        <a:srgbClr val="555555"/>
-                      </a:solidFill>
-                      <a:prstDash val="solid"/>
-                      <a:round/>
-                      <a:headEnd type="none" w="med" len="med"/>
-                      <a:tailEnd type="none" w="med" len="med"/>
-                    </a:lnR>
-                    <a:lnT w="6350" cap="flat" cmpd="sng" algn="ctr">
-                      <a:solidFill>
-                        <a:srgbClr val="555555"/>
-                      </a:solidFill>
-                      <a:prstDash val="solid"/>
-                      <a:round/>
-                      <a:headEnd type="none" w="med" len="med"/>
-                      <a:tailEnd type="none" w="med" len="med"/>
-                    </a:lnT>
-                    <a:lnB w="6350" cap="flat" cmpd="sng" algn="ctr">
-                      <a:solidFill>
-                        <a:srgbClr val="555555"/>
-                      </a:solidFill>
-                      <a:prstDash val="solid"/>
-                      <a:round/>
-                      <a:headEnd type="none" w="med" len="med"/>
-                      <a:tailEnd type="none" w="med" len="med"/>
-                    </a:lnB>
-                    <a:solidFill>
-                      <a:srgbClr val="F5F5F5"/>
-                    </a:solidFill>
-                  </a:tcPr>
-                </a:tc>
-                <a:tc>
-                  <a:txBody>
-                    <a:bodyPr/>
-                    <a:lstStyle/>
-                    <a:p>
-                      <a:pPr marL="0" indent="0" algn="l">
-                        <a:buNone/>
-                      </a:pPr>
-                      <a:r>
-                        <a:rPr lang="en-US" sz="1100" dirty="0">
-                          <a:solidFill>
-                            <a:srgbClr val="000000"/>
-                          </a:solidFill>
-                          <a:latin typeface="Arial" panose="020B0604020202090204" pitchFamily="34" charset="0"/>
-                          <a:ea typeface="Arial" panose="020B0604020202090204" pitchFamily="34" charset="-122"/>
-                          <a:cs typeface="Arial" panose="020B0604020202090204" pitchFamily="34" charset="-120"/>
-                        </a:rPr>
-                        <a:t>Pf A-A intermediate ≈ StTrpS C (cross-species)</a:t>
-                      </a:r>
-                      <a:endParaRPr lang="en-US" sz="1100" dirty="0">
-                        <a:latin typeface="Arial" panose="020B0604020202090204" pitchFamily="34" charset="0"/>
-                        <a:ea typeface="Arial" panose="020B0604020202090204" pitchFamily="34" charset="0"/>
-                        <a:cs typeface="Arial" panose="020B0604020202090204" pitchFamily="34" charset="0"/>
-                      </a:endParaRPr>
-                    </a:p>
-                  </a:txBody>
-                  <a:tcPr anchor="ctr">
-                    <a:lnL w="6350" cap="flat" cmpd="sng" algn="ctr">
-                      <a:solidFill>
-                        <a:srgbClr val="555555"/>
-                      </a:solidFill>
-                      <a:prstDash val="solid"/>
-                      <a:round/>
-                      <a:headEnd type="none" w="med" len="med"/>
-                      <a:tailEnd type="none" w="med" len="med"/>
-                    </a:lnL>
-                    <a:lnR w="6350" cap="flat" cmpd="sng" algn="ctr">
-                      <a:solidFill>
-                        <a:srgbClr val="555555"/>
-                      </a:solidFill>
-                      <a:prstDash val="solid"/>
-                      <a:round/>
-                      <a:headEnd type="none" w="med" len="med"/>
-                      <a:tailEnd type="none" w="med" len="med"/>
-                    </a:lnR>
-                    <a:lnT w="6350" cap="flat" cmpd="sng" algn="ctr">
-                      <a:solidFill>
-                        <a:srgbClr val="555555"/>
-                      </a:solidFill>
-                      <a:prstDash val="solid"/>
-                      <a:round/>
-                      <a:headEnd type="none" w="med" len="med"/>
-                      <a:tailEnd type="none" w="med" len="med"/>
-                    </a:lnT>
-                    <a:lnB w="6350" cap="flat" cmpd="sng" algn="ctr">
-                      <a:solidFill>
-                        <a:srgbClr val="555555"/>
-                      </a:solidFill>
-                      <a:prstDash val="solid"/>
-                      <a:round/>
-                      <a:headEnd type="none" w="med" len="med"/>
-                      <a:tailEnd type="none" w="med" len="med"/>
-                    </a:lnB>
-                    <a:solidFill>
-                      <a:srgbClr val="F5F5F5"/>
-                    </a:solidFill>
-                  </a:tcPr>
-                </a:tc>
-              </a:tr>
-              <a:tr h="274320">
-                <a:tc>
-                  <a:txBody>
-                    <a:bodyPr/>
-                    <a:lstStyle/>
-                    <a:p>
-                      <a:pPr marL="0" indent="0" algn="l">
-                        <a:buNone/>
-                      </a:pPr>
-                      <a:r>
-                        <a:rPr lang="en-US" sz="1100" dirty="0">
-                          <a:solidFill>
-                            <a:srgbClr val="000000"/>
-                          </a:solidFill>
-                          <a:latin typeface="Arial" panose="020B0604020202090204" pitchFamily="34" charset="0"/>
-                          <a:ea typeface="Arial" panose="020B0604020202090204" pitchFamily="34" charset="-122"/>
-                          <a:cs typeface="Arial" panose="020B0604020202090204" pitchFamily="34" charset="-120"/>
-                        </a:rPr>
-                        <a:t>5DW0</a:t>
-                      </a:r>
-                      <a:endParaRPr lang="en-US" sz="1100" dirty="0">
-                        <a:latin typeface="Arial" panose="020B0604020202090204" pitchFamily="34" charset="0"/>
-                        <a:ea typeface="Arial" panose="020B0604020202090204" pitchFamily="34" charset="0"/>
-                        <a:cs typeface="Arial" panose="020B0604020202090204" pitchFamily="34" charset="0"/>
-                      </a:endParaRPr>
-                    </a:p>
-                  </a:txBody>
-                  <a:tcPr anchor="ctr">
-                    <a:lnL w="6350" cap="flat" cmpd="sng" algn="ctr">
-                      <a:solidFill>
-                        <a:srgbClr val="555555"/>
-                      </a:solidFill>
-                      <a:prstDash val="solid"/>
-                      <a:round/>
-                      <a:headEnd type="none" w="med" len="med"/>
-                      <a:tailEnd type="none" w="med" len="med"/>
-                    </a:lnL>
-                    <a:lnR w="6350" cap="flat" cmpd="sng" algn="ctr">
-                      <a:solidFill>
-                        <a:srgbClr val="555555"/>
-                      </a:solidFill>
-                      <a:prstDash val="solid"/>
-                      <a:round/>
-                      <a:headEnd type="none" w="med" len="med"/>
-                      <a:tailEnd type="none" w="med" len="med"/>
-                    </a:lnR>
-                    <a:lnT w="6350" cap="flat" cmpd="sng" algn="ctr">
-                      <a:solidFill>
-                        <a:srgbClr val="555555"/>
-                      </a:solidFill>
-                      <a:prstDash val="solid"/>
-                      <a:round/>
-                      <a:headEnd type="none" w="med" len="med"/>
-                      <a:tailEnd type="none" w="med" len="med"/>
-                    </a:lnT>
-                    <a:lnB w="6350" cap="flat" cmpd="sng" algn="ctr">
-                      <a:solidFill>
-                        <a:srgbClr val="555555"/>
-                      </a:solidFill>
-                      <a:prstDash val="solid"/>
-                      <a:round/>
-                      <a:headEnd type="none" w="med" len="med"/>
-                      <a:tailEnd type="none" w="med" len="med"/>
-                    </a:lnB>
-                    <a:solidFill>
-                      <a:srgbClr val="F5F5F5"/>
-                    </a:solidFill>
-                  </a:tcPr>
-                </a:tc>
-                <a:tc>
-                  <a:txBody>
-                    <a:bodyPr/>
-                    <a:lstStyle/>
-                    <a:p>
-                      <a:pPr marL="0" indent="0" algn="l">
-                        <a:buNone/>
-                      </a:pPr>
-                      <a:r>
-                        <a:rPr lang="en-US" sz="1100" dirty="0">
-                          <a:solidFill>
-                            <a:srgbClr val="000000"/>
-                          </a:solidFill>
-                          <a:latin typeface="Arial" panose="020B0604020202090204" pitchFamily="34" charset="0"/>
-                          <a:ea typeface="Arial" panose="020B0604020202090204" pitchFamily="34" charset="-122"/>
-                          <a:cs typeface="Arial" panose="020B0604020202090204" pitchFamily="34" charset="-120"/>
-                        </a:rPr>
-                        <a:t>A</a:t>
-                      </a:r>
-                      <a:endParaRPr lang="en-US" sz="1100" dirty="0">
-                        <a:latin typeface="Arial" panose="020B0604020202090204" pitchFamily="34" charset="0"/>
-                        <a:ea typeface="Arial" panose="020B0604020202090204" pitchFamily="34" charset="0"/>
-                        <a:cs typeface="Arial" panose="020B0604020202090204" pitchFamily="34" charset="0"/>
-                      </a:endParaRPr>
-                    </a:p>
-                  </a:txBody>
-                  <a:tcPr anchor="ctr">
-                    <a:lnL w="6350" cap="flat" cmpd="sng" algn="ctr">
-                      <a:solidFill>
-                        <a:srgbClr val="555555"/>
-                      </a:solidFill>
-                      <a:prstDash val="solid"/>
-                      <a:round/>
-                      <a:headEnd type="none" w="med" len="med"/>
-                      <a:tailEnd type="none" w="med" len="med"/>
-                    </a:lnL>
-                    <a:lnR w="6350" cap="flat" cmpd="sng" algn="ctr">
-                      <a:solidFill>
-                        <a:srgbClr val="555555"/>
-                      </a:solidFill>
-                      <a:prstDash val="solid"/>
-                      <a:round/>
-                      <a:headEnd type="none" w="med" len="med"/>
-                      <a:tailEnd type="none" w="med" len="med"/>
-                    </a:lnR>
-                    <a:lnT w="6350" cap="flat" cmpd="sng" algn="ctr">
-                      <a:solidFill>
-                        <a:srgbClr val="555555"/>
-                      </a:solidFill>
-                      <a:prstDash val="solid"/>
-                      <a:round/>
-                      <a:headEnd type="none" w="med" len="med"/>
-                      <a:tailEnd type="none" w="med" len="med"/>
-                    </a:lnT>
-                    <a:lnB w="6350" cap="flat" cmpd="sng" algn="ctr">
-                      <a:solidFill>
-                        <a:srgbClr val="555555"/>
-                      </a:solidFill>
-                      <a:prstDash val="solid"/>
-                      <a:round/>
-                      <a:headEnd type="none" w="med" len="med"/>
-                      <a:tailEnd type="none" w="med" len="med"/>
-                    </a:lnB>
-                    <a:solidFill>
-                      <a:srgbClr val="F5F5F5"/>
-                    </a:solidFill>
-                  </a:tcPr>
-                </a:tc>
-                <a:tc>
-                  <a:txBody>
-                    <a:bodyPr/>
-                    <a:lstStyle/>
-                    <a:p>
-                      <a:pPr marL="0" indent="0" algn="l">
-                        <a:buNone/>
-                      </a:pPr>
-                      <a:r>
-                        <a:rPr lang="en-US" sz="1100" dirty="0">
-                          <a:solidFill>
-                            <a:srgbClr val="000000"/>
-                          </a:solidFill>
-                          <a:latin typeface="Arial" panose="020B0604020202090204" pitchFamily="34" charset="0"/>
-                          <a:ea typeface="Arial" panose="020B0604020202090204" pitchFamily="34" charset="-122"/>
-                          <a:cs typeface="Arial" panose="020B0604020202090204" pitchFamily="34" charset="-120"/>
-                        </a:rPr>
-                        <a:t>112/112</a:t>
-                      </a:r>
-                      <a:endParaRPr lang="en-US" sz="1100" dirty="0">
-                        <a:latin typeface="Arial" panose="020B0604020202090204" pitchFamily="34" charset="0"/>
-                        <a:ea typeface="Arial" panose="020B0604020202090204" pitchFamily="34" charset="0"/>
-                        <a:cs typeface="Arial" panose="020B0604020202090204" pitchFamily="34" charset="0"/>
-                      </a:endParaRPr>
-                    </a:p>
-                  </a:txBody>
-                  <a:tcPr anchor="ctr">
-                    <a:lnL w="6350" cap="flat" cmpd="sng" algn="ctr">
-                      <a:solidFill>
-                        <a:srgbClr val="555555"/>
-                      </a:solidFill>
-                      <a:prstDash val="solid"/>
-                      <a:round/>
-                      <a:headEnd type="none" w="med" len="med"/>
-                      <a:tailEnd type="none" w="med" len="med"/>
-                    </a:lnL>
-                    <a:lnR w="6350" cap="flat" cmpd="sng" algn="ctr">
-                      <a:solidFill>
-                        <a:srgbClr val="555555"/>
-                      </a:solidFill>
-                      <a:prstDash val="solid"/>
-                      <a:round/>
-                      <a:headEnd type="none" w="med" len="med"/>
-                      <a:tailEnd type="none" w="med" len="med"/>
-                    </a:lnR>
-                    <a:lnT w="6350" cap="flat" cmpd="sng" algn="ctr">
-                      <a:solidFill>
-                        <a:srgbClr val="555555"/>
-                      </a:solidFill>
-                      <a:prstDash val="solid"/>
-                      <a:round/>
-                      <a:headEnd type="none" w="med" len="med"/>
-                      <a:tailEnd type="none" w="med" len="med"/>
-                    </a:lnT>
-                    <a:lnB w="6350" cap="flat" cmpd="sng" algn="ctr">
-                      <a:solidFill>
-                        <a:srgbClr val="555555"/>
-                      </a:solidFill>
-                      <a:prstDash val="solid"/>
-                      <a:round/>
-                      <a:headEnd type="none" w="med" len="med"/>
-                      <a:tailEnd type="none" w="med" len="med"/>
-                    </a:lnB>
-                    <a:solidFill>
-                      <a:srgbClr val="F5F5F5"/>
-                    </a:solidFill>
-                  </a:tcPr>
-                </a:tc>
-                <a:tc>
-                  <a:txBody>
-                    <a:bodyPr/>
-                    <a:lstStyle/>
-                    <a:p>
-                      <a:pPr marL="0" indent="0" algn="l">
-                        <a:buNone/>
-                      </a:pPr>
-                      <a:r>
-                        <a:rPr lang="en-US" sz="1100" dirty="0">
-                          <a:solidFill>
-                            <a:srgbClr val="000000"/>
-                          </a:solidFill>
-                          <a:latin typeface="Arial" panose="020B0604020202090204" pitchFamily="34" charset="0"/>
-                          <a:ea typeface="Arial" panose="020B0604020202090204" pitchFamily="34" charset="-122"/>
-                          <a:cs typeface="Arial" panose="020B0604020202090204" pitchFamily="34" charset="-120"/>
-                        </a:rPr>
-                        <a:t>1.07</a:t>
-                      </a:r>
-                      <a:endParaRPr lang="en-US" sz="1100" dirty="0">
-                        <a:latin typeface="Arial" panose="020B0604020202090204" pitchFamily="34" charset="0"/>
-                        <a:ea typeface="Arial" panose="020B0604020202090204" pitchFamily="34" charset="0"/>
-                        <a:cs typeface="Arial" panose="020B0604020202090204" pitchFamily="34" charset="0"/>
-                      </a:endParaRPr>
-                    </a:p>
-                  </a:txBody>
-                  <a:tcPr anchor="ctr">
-                    <a:lnL w="6350" cap="flat" cmpd="sng" algn="ctr">
-                      <a:solidFill>
-                        <a:srgbClr val="555555"/>
-                      </a:solidFill>
-                      <a:prstDash val="solid"/>
-                      <a:round/>
-                      <a:headEnd type="none" w="med" len="med"/>
-                      <a:tailEnd type="none" w="med" len="med"/>
-                    </a:lnL>
-                    <a:lnR w="6350" cap="flat" cmpd="sng" algn="ctr">
-                      <a:solidFill>
-                        <a:srgbClr val="555555"/>
-                      </a:solidFill>
-                      <a:prstDash val="solid"/>
-                      <a:round/>
-                      <a:headEnd type="none" w="med" len="med"/>
-                      <a:tailEnd type="none" w="med" len="med"/>
-                    </a:lnR>
-                    <a:lnT w="6350" cap="flat" cmpd="sng" algn="ctr">
-                      <a:solidFill>
-                        <a:srgbClr val="555555"/>
-                      </a:solidFill>
-                      <a:prstDash val="solid"/>
-                      <a:round/>
-                      <a:headEnd type="none" w="med" len="med"/>
-                      <a:tailEnd type="none" w="med" len="med"/>
-                    </a:lnT>
-                    <a:lnB w="6350" cap="flat" cmpd="sng" algn="ctr">
-                      <a:solidFill>
-                        <a:srgbClr val="555555"/>
-                      </a:solidFill>
-                      <a:prstDash val="solid"/>
-                      <a:round/>
-                      <a:headEnd type="none" w="med" len="med"/>
-                      <a:tailEnd type="none" w="med" len="med"/>
-                    </a:lnB>
-                    <a:solidFill>
-                      <a:srgbClr val="F5F5F5"/>
-                    </a:solidFill>
-                  </a:tcPr>
-                </a:tc>
-                <a:tc>
-                  <a:txBody>
-                    <a:bodyPr/>
-                    <a:lstStyle/>
-                    <a:p>
-                      <a:pPr marL="0" indent="0" algn="l">
-                        <a:buNone/>
-                      </a:pPr>
-                      <a:r>
-                        <a:rPr lang="en-US" sz="1100" dirty="0">
-                          <a:solidFill>
-                            <a:srgbClr val="000000"/>
-                          </a:solidFill>
-                          <a:latin typeface="Arial" panose="020B0604020202090204" pitchFamily="34" charset="0"/>
-                          <a:ea typeface="Arial" panose="020B0604020202090204" pitchFamily="34" charset="-122"/>
-                          <a:cs typeface="Arial" panose="020B0604020202090204" pitchFamily="34" charset="-120"/>
-                        </a:rPr>
-                        <a:t>+0.02451</a:t>
-                      </a:r>
-                      <a:endParaRPr lang="en-US" sz="1100" dirty="0">
-                        <a:latin typeface="Arial" panose="020B0604020202090204" pitchFamily="34" charset="0"/>
-                        <a:ea typeface="Arial" panose="020B0604020202090204" pitchFamily="34" charset="0"/>
-                        <a:cs typeface="Arial" panose="020B0604020202090204" pitchFamily="34" charset="0"/>
-                      </a:endParaRPr>
-                    </a:p>
-                  </a:txBody>
-                  <a:tcPr anchor="ctr">
-                    <a:lnL w="6350" cap="flat" cmpd="sng" algn="ctr">
-                      <a:solidFill>
-                        <a:srgbClr val="555555"/>
-                      </a:solidFill>
-                      <a:prstDash val="solid"/>
-                      <a:round/>
-                      <a:headEnd type="none" w="med" len="med"/>
-                      <a:tailEnd type="none" w="med" len="med"/>
-                    </a:lnL>
-                    <a:lnR w="6350" cap="flat" cmpd="sng" algn="ctr">
-                      <a:solidFill>
-                        <a:srgbClr val="555555"/>
-                      </a:solidFill>
-                      <a:prstDash val="solid"/>
-                      <a:round/>
-                      <a:headEnd type="none" w="med" len="med"/>
-                      <a:tailEnd type="none" w="med" len="med"/>
-                    </a:lnR>
-                    <a:lnT w="6350" cap="flat" cmpd="sng" algn="ctr">
-                      <a:solidFill>
-                        <a:srgbClr val="555555"/>
-                      </a:solidFill>
-                      <a:prstDash val="solid"/>
-                      <a:round/>
-                      <a:headEnd type="none" w="med" len="med"/>
-                      <a:tailEnd type="none" w="med" len="med"/>
-                    </a:lnT>
-                    <a:lnB w="6350" cap="flat" cmpd="sng" algn="ctr">
-                      <a:solidFill>
-                        <a:srgbClr val="555555"/>
-                      </a:solidFill>
-                      <a:prstDash val="solid"/>
-                      <a:round/>
-                      <a:headEnd type="none" w="med" len="med"/>
-                      <a:tailEnd type="none" w="med" len="med"/>
-                    </a:lnB>
-                    <a:solidFill>
-                      <a:srgbClr val="F5F5F5"/>
-                    </a:solidFill>
-                  </a:tcPr>
-                </a:tc>
-                <a:tc>
-                  <a:txBody>
-                    <a:bodyPr/>
-                    <a:lstStyle/>
-                    <a:p>
-                      <a:pPr marL="0" indent="0" algn="l">
-                        <a:buNone/>
-                      </a:pPr>
-                      <a:r>
-                        <a:rPr lang="en-US" sz="1100" dirty="0">
-                          <a:solidFill>
-                            <a:srgbClr val="000000"/>
-                          </a:solidFill>
-                          <a:latin typeface="Arial" panose="020B0604020202090204" pitchFamily="34" charset="0"/>
-                          <a:ea typeface="Arial" panose="020B0604020202090204" pitchFamily="34" charset="-122"/>
-                          <a:cs typeface="Arial" panose="020B0604020202090204" pitchFamily="34" charset="-120"/>
-                        </a:rPr>
-                        <a:t>Pf + L-Ser (Aex1), O-like</a:t>
-                      </a:r>
-                      <a:endParaRPr lang="en-US" sz="1100" dirty="0">
-                        <a:latin typeface="Arial" panose="020B0604020202090204" pitchFamily="34" charset="0"/>
-                        <a:ea typeface="Arial" panose="020B0604020202090204" pitchFamily="34" charset="0"/>
-                        <a:cs typeface="Arial" panose="020B0604020202090204" pitchFamily="34" charset="0"/>
-                      </a:endParaRPr>
-                    </a:p>
-                  </a:txBody>
-                  <a:tcPr anchor="ctr">
-                    <a:lnL w="6350" cap="flat" cmpd="sng" algn="ctr">
-                      <a:solidFill>
-                        <a:srgbClr val="555555"/>
-                      </a:solidFill>
-                      <a:prstDash val="solid"/>
-                      <a:round/>
-                      <a:headEnd type="none" w="med" len="med"/>
-                      <a:tailEnd type="none" w="med" len="med"/>
-                    </a:lnL>
-                    <a:lnR w="6350" cap="flat" cmpd="sng" algn="ctr">
-                      <a:solidFill>
-                        <a:srgbClr val="555555"/>
-                      </a:solidFill>
-                      <a:prstDash val="solid"/>
-                      <a:round/>
-                      <a:headEnd type="none" w="med" len="med"/>
-                      <a:tailEnd type="none" w="med" len="med"/>
-                    </a:lnR>
-                    <a:lnT w="6350" cap="flat" cmpd="sng" algn="ctr">
-                      <a:solidFill>
-                        <a:srgbClr val="555555"/>
-                      </a:solidFill>
-                      <a:prstDash val="solid"/>
-                      <a:round/>
-                      <a:headEnd type="none" w="med" len="med"/>
-                      <a:tailEnd type="none" w="med" len="med"/>
-                    </a:lnT>
-                    <a:lnB w="6350" cap="flat" cmpd="sng" algn="ctr">
-                      <a:solidFill>
-                        <a:srgbClr val="555555"/>
-                      </a:solidFill>
-                      <a:prstDash val="solid"/>
-                      <a:round/>
-                      <a:headEnd type="none" w="med" len="med"/>
-                      <a:tailEnd type="none" w="med" len="med"/>
-                    </a:lnB>
-                    <a:solidFill>
-                      <a:srgbClr val="F5F5F5"/>
-                    </a:solidFill>
-                  </a:tcPr>
-                </a:tc>
-              </a:tr>
-              <a:tr h="274320">
-                <a:tc>
-                  <a:txBody>
-                    <a:bodyPr/>
-                    <a:lstStyle/>
-                    <a:p>
-                      <a:pPr marL="0" indent="0" algn="l">
-                        <a:buNone/>
-                      </a:pPr>
-                      <a:r>
-                        <a:rPr lang="en-US" sz="1100" dirty="0">
-                          <a:solidFill>
-                            <a:srgbClr val="000000"/>
-                          </a:solidFill>
-                          <a:latin typeface="Arial" panose="020B0604020202090204" pitchFamily="34" charset="0"/>
-                          <a:ea typeface="Arial" panose="020B0604020202090204" pitchFamily="34" charset="-122"/>
-                          <a:cs typeface="Arial" panose="020B0604020202090204" pitchFamily="34" charset="-120"/>
-                        </a:rPr>
-                        <a:t>5DVZ</a:t>
-                      </a:r>
-                      <a:endParaRPr lang="en-US" sz="1100" dirty="0">
-                        <a:latin typeface="Arial" panose="020B0604020202090204" pitchFamily="34" charset="0"/>
-                        <a:ea typeface="Arial" panose="020B0604020202090204" pitchFamily="34" charset="0"/>
-                        <a:cs typeface="Arial" panose="020B0604020202090204" pitchFamily="34" charset="0"/>
-                      </a:endParaRPr>
-                    </a:p>
-                  </a:txBody>
-                  <a:tcPr anchor="ctr">
-                    <a:lnL w="6350" cap="flat" cmpd="sng" algn="ctr">
-                      <a:solidFill>
-                        <a:srgbClr val="555555"/>
-                      </a:solidFill>
-                      <a:prstDash val="solid"/>
-                      <a:round/>
-                      <a:headEnd type="none" w="med" len="med"/>
-                      <a:tailEnd type="none" w="med" len="med"/>
-                    </a:lnL>
-                    <a:lnR w="6350" cap="flat" cmpd="sng" algn="ctr">
-                      <a:solidFill>
-                        <a:srgbClr val="555555"/>
-                      </a:solidFill>
-                      <a:prstDash val="solid"/>
-                      <a:round/>
-                      <a:headEnd type="none" w="med" len="med"/>
-                      <a:tailEnd type="none" w="med" len="med"/>
-                    </a:lnR>
-                    <a:lnT w="6350" cap="flat" cmpd="sng" algn="ctr">
-                      <a:solidFill>
-                        <a:srgbClr val="555555"/>
-                      </a:solidFill>
-                      <a:prstDash val="solid"/>
-                      <a:round/>
-                      <a:headEnd type="none" w="med" len="med"/>
-                      <a:tailEnd type="none" w="med" len="med"/>
-                    </a:lnT>
-                    <a:lnB w="6350" cap="flat" cmpd="sng" algn="ctr">
-                      <a:solidFill>
-                        <a:srgbClr val="555555"/>
-                      </a:solidFill>
-                      <a:prstDash val="solid"/>
-                      <a:round/>
-                      <a:headEnd type="none" w="med" len="med"/>
-                      <a:tailEnd type="none" w="med" len="med"/>
-                    </a:lnB>
-                    <a:solidFill>
-                      <a:srgbClr val="F5F5F5"/>
-                    </a:solidFill>
-                  </a:tcPr>
-                </a:tc>
-                <a:tc>
-                  <a:txBody>
-                    <a:bodyPr/>
-                    <a:lstStyle/>
-                    <a:p>
-                      <a:pPr marL="0" indent="0" algn="l">
-                        <a:buNone/>
-                      </a:pPr>
-                      <a:r>
-                        <a:rPr lang="en-US" sz="1100" dirty="0">
-                          <a:solidFill>
-                            <a:srgbClr val="000000"/>
-                          </a:solidFill>
-                          <a:latin typeface="Arial" panose="020B0604020202090204" pitchFamily="34" charset="0"/>
-                          <a:ea typeface="Arial" panose="020B0604020202090204" pitchFamily="34" charset="-122"/>
-                          <a:cs typeface="Arial" panose="020B0604020202090204" pitchFamily="34" charset="-120"/>
-                        </a:rPr>
-                        <a:t>A</a:t>
-                      </a:r>
-                      <a:endParaRPr lang="en-US" sz="1100" dirty="0">
-                        <a:latin typeface="Arial" panose="020B0604020202090204" pitchFamily="34" charset="0"/>
-                        <a:ea typeface="Arial" panose="020B0604020202090204" pitchFamily="34" charset="0"/>
-                        <a:cs typeface="Arial" panose="020B0604020202090204" pitchFamily="34" charset="0"/>
-                      </a:endParaRPr>
-                    </a:p>
-                  </a:txBody>
-                  <a:tcPr anchor="ctr">
-                    <a:lnL w="6350" cap="flat" cmpd="sng" algn="ctr">
-                      <a:solidFill>
-                        <a:srgbClr val="555555"/>
-                      </a:solidFill>
-                      <a:prstDash val="solid"/>
-                      <a:round/>
-                      <a:headEnd type="none" w="med" len="med"/>
-                      <a:tailEnd type="none" w="med" len="med"/>
-                    </a:lnL>
-                    <a:lnR w="6350" cap="flat" cmpd="sng" algn="ctr">
-                      <a:solidFill>
-                        <a:srgbClr val="555555"/>
-                      </a:solidFill>
-                      <a:prstDash val="solid"/>
-                      <a:round/>
-                      <a:headEnd type="none" w="med" len="med"/>
-                      <a:tailEnd type="none" w="med" len="med"/>
-                    </a:lnR>
-                    <a:lnT w="6350" cap="flat" cmpd="sng" algn="ctr">
-                      <a:solidFill>
-                        <a:srgbClr val="555555"/>
-                      </a:solidFill>
-                      <a:prstDash val="solid"/>
-                      <a:round/>
-                      <a:headEnd type="none" w="med" len="med"/>
-                      <a:tailEnd type="none" w="med" len="med"/>
-                    </a:lnT>
-                    <a:lnB w="6350" cap="flat" cmpd="sng" algn="ctr">
-                      <a:solidFill>
-                        <a:srgbClr val="555555"/>
-                      </a:solidFill>
-                      <a:prstDash val="solid"/>
-                      <a:round/>
-                      <a:headEnd type="none" w="med" len="med"/>
-                      <a:tailEnd type="none" w="med" len="med"/>
-                    </a:lnB>
-                    <a:solidFill>
-                      <a:srgbClr val="F5F5F5"/>
-                    </a:solidFill>
-                  </a:tcPr>
-                </a:tc>
-                <a:tc>
-                  <a:txBody>
-                    <a:bodyPr/>
-                    <a:lstStyle/>
-                    <a:p>
-                      <a:pPr marL="0" indent="0" algn="l">
-                        <a:buNone/>
-                      </a:pPr>
-                      <a:r>
-                        <a:rPr lang="en-US" sz="1100" dirty="0">
-                          <a:solidFill>
-                            <a:srgbClr val="000000"/>
-                          </a:solidFill>
-                          <a:latin typeface="Arial" panose="020B0604020202090204" pitchFamily="34" charset="0"/>
-                          <a:ea typeface="Arial" panose="020B0604020202090204" pitchFamily="34" charset="-122"/>
-                          <a:cs typeface="Arial" panose="020B0604020202090204" pitchFamily="34" charset="-120"/>
-                        </a:rPr>
-                        <a:t>112/112</a:t>
-                      </a:r>
-                      <a:endParaRPr lang="en-US" sz="1100" dirty="0">
-                        <a:latin typeface="Arial" panose="020B0604020202090204" pitchFamily="34" charset="0"/>
-                        <a:ea typeface="Arial" panose="020B0604020202090204" pitchFamily="34" charset="0"/>
-                        <a:cs typeface="Arial" panose="020B0604020202090204" pitchFamily="34" charset="0"/>
-                      </a:endParaRPr>
-                    </a:p>
-                  </a:txBody>
-                  <a:tcPr anchor="ctr">
-                    <a:lnL w="6350" cap="flat" cmpd="sng" algn="ctr">
-                      <a:solidFill>
-                        <a:srgbClr val="555555"/>
-                      </a:solidFill>
-                      <a:prstDash val="solid"/>
-                      <a:round/>
-                      <a:headEnd type="none" w="med" len="med"/>
-                      <a:tailEnd type="none" w="med" len="med"/>
-                    </a:lnL>
-                    <a:lnR w="6350" cap="flat" cmpd="sng" algn="ctr">
-                      <a:solidFill>
-                        <a:srgbClr val="555555"/>
-                      </a:solidFill>
-                      <a:prstDash val="solid"/>
-                      <a:round/>
-                      <a:headEnd type="none" w="med" len="med"/>
-                      <a:tailEnd type="none" w="med" len="med"/>
-                    </a:lnR>
-                    <a:lnT w="6350" cap="flat" cmpd="sng" algn="ctr">
-                      <a:solidFill>
-                        <a:srgbClr val="555555"/>
-                      </a:solidFill>
-                      <a:prstDash val="solid"/>
-                      <a:round/>
-                      <a:headEnd type="none" w="med" len="med"/>
-                      <a:tailEnd type="none" w="med" len="med"/>
-                    </a:lnT>
-                    <a:lnB w="6350" cap="flat" cmpd="sng" algn="ctr">
-                      <a:solidFill>
-                        <a:srgbClr val="555555"/>
-                      </a:solidFill>
-                      <a:prstDash val="solid"/>
-                      <a:round/>
-                      <a:headEnd type="none" w="med" len="med"/>
-                      <a:tailEnd type="none" w="med" len="med"/>
-                    </a:lnB>
-                    <a:solidFill>
-                      <a:srgbClr val="F5F5F5"/>
-                    </a:solidFill>
-                  </a:tcPr>
-                </a:tc>
-                <a:tc>
-                  <a:txBody>
-                    <a:bodyPr/>
-                    <a:lstStyle/>
-                    <a:p>
-                      <a:pPr marL="0" indent="0" algn="l">
-                        <a:buNone/>
-                      </a:pPr>
-                      <a:r>
-                        <a:rPr lang="en-US" sz="1100" dirty="0">
-                          <a:solidFill>
-                            <a:srgbClr val="000000"/>
-                          </a:solidFill>
-                          <a:latin typeface="Arial" panose="020B0604020202090204" pitchFamily="34" charset="0"/>
-                          <a:ea typeface="Arial" panose="020B0604020202090204" pitchFamily="34" charset="-122"/>
-                          <a:cs typeface="Arial" panose="020B0604020202090204" pitchFamily="34" charset="-120"/>
-                        </a:rPr>
-                        <a:t>1.07</a:t>
-                      </a:r>
-                      <a:endParaRPr lang="en-US" sz="1100" dirty="0">
-                        <a:latin typeface="Arial" panose="020B0604020202090204" pitchFamily="34" charset="0"/>
-                        <a:ea typeface="Arial" panose="020B0604020202090204" pitchFamily="34" charset="0"/>
-                        <a:cs typeface="Arial" panose="020B0604020202090204" pitchFamily="34" charset="0"/>
-                      </a:endParaRPr>
-                    </a:p>
-                  </a:txBody>
-                  <a:tcPr anchor="ctr">
-                    <a:lnL w="6350" cap="flat" cmpd="sng" algn="ctr">
-                      <a:solidFill>
-                        <a:srgbClr val="555555"/>
-                      </a:solidFill>
-                      <a:prstDash val="solid"/>
-                      <a:round/>
-                      <a:headEnd type="none" w="med" len="med"/>
-                      <a:tailEnd type="none" w="med" len="med"/>
-                    </a:lnL>
-                    <a:lnR w="6350" cap="flat" cmpd="sng" algn="ctr">
-                      <a:solidFill>
-                        <a:srgbClr val="555555"/>
-                      </a:solidFill>
-                      <a:prstDash val="solid"/>
-                      <a:round/>
-                      <a:headEnd type="none" w="med" len="med"/>
-                      <a:tailEnd type="none" w="med" len="med"/>
-                    </a:lnR>
-                    <a:lnT w="6350" cap="flat" cmpd="sng" algn="ctr">
-                      <a:solidFill>
-                        <a:srgbClr val="555555"/>
-                      </a:solidFill>
-                      <a:prstDash val="solid"/>
-                      <a:round/>
-                      <a:headEnd type="none" w="med" len="med"/>
-                      <a:tailEnd type="none" w="med" len="med"/>
-                    </a:lnT>
-                    <a:lnB w="6350" cap="flat" cmpd="sng" algn="ctr">
-                      <a:solidFill>
-                        <a:srgbClr val="555555"/>
-                      </a:solidFill>
-                      <a:prstDash val="solid"/>
-                      <a:round/>
-                      <a:headEnd type="none" w="med" len="med"/>
-                      <a:tailEnd type="none" w="med" len="med"/>
-                    </a:lnB>
-                    <a:solidFill>
-                      <a:srgbClr val="F5F5F5"/>
-                    </a:solidFill>
-                  </a:tcPr>
-                </a:tc>
-                <a:tc>
-                  <a:txBody>
-                    <a:bodyPr/>
-                    <a:lstStyle/>
-                    <a:p>
-                      <a:pPr marL="0" indent="0" algn="l">
-                        <a:buNone/>
-                      </a:pPr>
-                      <a:r>
-                        <a:rPr lang="en-US" sz="1100" dirty="0">
-                          <a:solidFill>
-                            <a:srgbClr val="000000"/>
-                          </a:solidFill>
-                          <a:latin typeface="Arial" panose="020B0604020202090204" pitchFamily="34" charset="0"/>
-                          <a:ea typeface="Arial" panose="020B0604020202090204" pitchFamily="34" charset="-122"/>
-                          <a:cs typeface="Arial" panose="020B0604020202090204" pitchFamily="34" charset="-120"/>
-                        </a:rPr>
-                        <a:t>+0.01734</a:t>
-                      </a:r>
-                      <a:endParaRPr lang="en-US" sz="1100" dirty="0">
-                        <a:latin typeface="Arial" panose="020B0604020202090204" pitchFamily="34" charset="0"/>
-                        <a:ea typeface="Arial" panose="020B0604020202090204" pitchFamily="34" charset="0"/>
-                        <a:cs typeface="Arial" panose="020B0604020202090204" pitchFamily="34" charset="0"/>
-                      </a:endParaRPr>
-                    </a:p>
-                  </a:txBody>
-                  <a:tcPr anchor="ctr">
-                    <a:lnL w="6350" cap="flat" cmpd="sng" algn="ctr">
-                      <a:solidFill>
-                        <a:srgbClr val="555555"/>
-                      </a:solidFill>
-                      <a:prstDash val="solid"/>
-                      <a:round/>
-                      <a:headEnd type="none" w="med" len="med"/>
-                      <a:tailEnd type="none" w="med" len="med"/>
-                    </a:lnL>
-                    <a:lnR w="6350" cap="flat" cmpd="sng" algn="ctr">
-                      <a:solidFill>
-                        <a:srgbClr val="555555"/>
-                      </a:solidFill>
-                      <a:prstDash val="solid"/>
-                      <a:round/>
-                      <a:headEnd type="none" w="med" len="med"/>
-                      <a:tailEnd type="none" w="med" len="med"/>
-                    </a:lnR>
-                    <a:lnT w="6350" cap="flat" cmpd="sng" algn="ctr">
-                      <a:solidFill>
-                        <a:srgbClr val="555555"/>
-                      </a:solidFill>
-                      <a:prstDash val="solid"/>
-                      <a:round/>
-                      <a:headEnd type="none" w="med" len="med"/>
-                      <a:tailEnd type="none" w="med" len="med"/>
-                    </a:lnT>
-                    <a:lnB w="6350" cap="flat" cmpd="sng" algn="ctr">
-                      <a:solidFill>
-                        <a:srgbClr val="555555"/>
-                      </a:solidFill>
-                      <a:prstDash val="solid"/>
-                      <a:round/>
-                      <a:headEnd type="none" w="med" len="med"/>
-                      <a:tailEnd type="none" w="med" len="med"/>
-                    </a:lnB>
-                    <a:solidFill>
-                      <a:srgbClr val="F5F5F5"/>
-                    </a:solidFill>
-                  </a:tcPr>
-                </a:tc>
-                <a:tc>
-                  <a:txBody>
-                    <a:bodyPr/>
-                    <a:lstStyle/>
-                    <a:p>
-                      <a:pPr marL="0" indent="0" algn="l">
-                        <a:buNone/>
-                      </a:pPr>
-                      <a:r>
-                        <a:rPr lang="en-US" sz="1100" dirty="0">
-                          <a:solidFill>
-                            <a:srgbClr val="000000"/>
-                          </a:solidFill>
-                          <a:latin typeface="Arial" panose="020B0604020202090204" pitchFamily="34" charset="0"/>
-                          <a:ea typeface="Arial" panose="020B0604020202090204" pitchFamily="34" charset="-122"/>
-                          <a:cs typeface="Arial" panose="020B0604020202090204" pitchFamily="34" charset="-120"/>
-                        </a:rPr>
-                        <a:t>Pf holo, O-like</a:t>
-                      </a:r>
-                      <a:endParaRPr lang="en-US" sz="1100" dirty="0">
-                        <a:latin typeface="Arial" panose="020B0604020202090204" pitchFamily="34" charset="0"/>
-                        <a:ea typeface="Arial" panose="020B0604020202090204" pitchFamily="34" charset="0"/>
-                        <a:cs typeface="Arial" panose="020B0604020202090204" pitchFamily="34" charset="0"/>
-                      </a:endParaRPr>
-                    </a:p>
-                  </a:txBody>
-                  <a:tcPr anchor="ctr">
-                    <a:lnL w="6350" cap="flat" cmpd="sng" algn="ctr">
-                      <a:solidFill>
-                        <a:srgbClr val="555555"/>
-                      </a:solidFill>
-                      <a:prstDash val="solid"/>
-                      <a:round/>
-                      <a:headEnd type="none" w="med" len="med"/>
-                      <a:tailEnd type="none" w="med" len="med"/>
-                    </a:lnL>
-                    <a:lnR w="6350" cap="flat" cmpd="sng" algn="ctr">
-                      <a:solidFill>
-                        <a:srgbClr val="555555"/>
-                      </a:solidFill>
-                      <a:prstDash val="solid"/>
-                      <a:round/>
-                      <a:headEnd type="none" w="med" len="med"/>
-                      <a:tailEnd type="none" w="med" len="med"/>
-                    </a:lnR>
-                    <a:lnT w="6350" cap="flat" cmpd="sng" algn="ctr">
-                      <a:solidFill>
-                        <a:srgbClr val="555555"/>
-                      </a:solidFill>
-                      <a:prstDash val="solid"/>
-                      <a:round/>
-                      <a:headEnd type="none" w="med" len="med"/>
-                      <a:tailEnd type="none" w="med" len="med"/>
-                    </a:lnT>
-                    <a:lnB w="6350" cap="flat" cmpd="sng" algn="ctr">
-                      <a:solidFill>
-                        <a:srgbClr val="555555"/>
-                      </a:solidFill>
-                      <a:prstDash val="solid"/>
-                      <a:round/>
-                      <a:headEnd type="none" w="med" len="med"/>
-                      <a:tailEnd type="none" w="med" len="med"/>
-                    </a:lnB>
-                    <a:solidFill>
-                      <a:srgbClr val="F5F5F5"/>
-                    </a:solidFill>
-                  </a:tcPr>
-                </a:tc>
-              </a:tr>
-              <a:tr h="274320">
-                <a:tc>
-                  <a:txBody>
-                    <a:bodyPr/>
-                    <a:lstStyle/>
-                    <a:p>
-                      <a:pPr marL="0" indent="0" algn="l">
-                        <a:buNone/>
-                      </a:pPr>
-                      <a:r>
-                        <a:rPr lang="en-US" sz="1100" dirty="0">
-                          <a:solidFill>
-                            <a:srgbClr val="000000"/>
-                          </a:solidFill>
-                          <a:latin typeface="Arial" panose="020B0604020202090204" pitchFamily="34" charset="0"/>
-                          <a:ea typeface="Arial" panose="020B0604020202090204" pitchFamily="34" charset="-122"/>
-                          <a:cs typeface="Arial" panose="020B0604020202090204" pitchFamily="34" charset="-120"/>
-                        </a:rPr>
-                        <a:t>5DW3</a:t>
-                      </a:r>
-                      <a:endParaRPr lang="en-US" sz="1100" dirty="0">
-                        <a:latin typeface="Arial" panose="020B0604020202090204" pitchFamily="34" charset="0"/>
-                        <a:ea typeface="Arial" panose="020B0604020202090204" pitchFamily="34" charset="0"/>
-                        <a:cs typeface="Arial" panose="020B0604020202090204" pitchFamily="34" charset="0"/>
-                      </a:endParaRPr>
-                    </a:p>
-                  </a:txBody>
-                  <a:tcPr anchor="ctr">
-                    <a:lnL w="6350" cap="flat" cmpd="sng" algn="ctr">
-                      <a:solidFill>
-                        <a:srgbClr val="555555"/>
-                      </a:solidFill>
-                      <a:prstDash val="solid"/>
-                      <a:round/>
-                      <a:headEnd type="none" w="med" len="med"/>
-                      <a:tailEnd type="none" w="med" len="med"/>
-                    </a:lnL>
-                    <a:lnR w="6350" cap="flat" cmpd="sng" algn="ctr">
-                      <a:solidFill>
-                        <a:srgbClr val="555555"/>
-                      </a:solidFill>
-                      <a:prstDash val="solid"/>
-                      <a:round/>
-                      <a:headEnd type="none" w="med" len="med"/>
-                      <a:tailEnd type="none" w="med" len="med"/>
-                    </a:lnR>
-                    <a:lnT w="6350" cap="flat" cmpd="sng" algn="ctr">
-                      <a:solidFill>
-                        <a:srgbClr val="555555"/>
-                      </a:solidFill>
-                      <a:prstDash val="solid"/>
-                      <a:round/>
-                      <a:headEnd type="none" w="med" len="med"/>
-                      <a:tailEnd type="none" w="med" len="med"/>
-                    </a:lnT>
-                    <a:lnB w="6350" cap="flat" cmpd="sng" algn="ctr">
-                      <a:solidFill>
-                        <a:srgbClr val="555555"/>
-                      </a:solidFill>
-                      <a:prstDash val="solid"/>
-                      <a:round/>
-                      <a:headEnd type="none" w="med" len="med"/>
-                      <a:tailEnd type="none" w="med" len="med"/>
-                    </a:lnB>
-                    <a:solidFill>
-                      <a:srgbClr val="F5F5F5"/>
-                    </a:solidFill>
-                  </a:tcPr>
-                </a:tc>
-                <a:tc>
-                  <a:txBody>
-                    <a:bodyPr/>
-                    <a:lstStyle/>
-                    <a:p>
-                      <a:pPr marL="0" indent="0" algn="l">
-                        <a:buNone/>
-                      </a:pPr>
-                      <a:r>
-                        <a:rPr lang="en-US" sz="1100" dirty="0">
-                          <a:solidFill>
-                            <a:srgbClr val="000000"/>
-                          </a:solidFill>
-                          <a:latin typeface="Arial" panose="020B0604020202090204" pitchFamily="34" charset="0"/>
-                          <a:ea typeface="Arial" panose="020B0604020202090204" pitchFamily="34" charset="-122"/>
-                          <a:cs typeface="Arial" panose="020B0604020202090204" pitchFamily="34" charset="-120"/>
-                        </a:rPr>
-                        <a:t>A</a:t>
-                      </a:r>
-                      <a:endParaRPr lang="en-US" sz="1100" dirty="0">
-                        <a:latin typeface="Arial" panose="020B0604020202090204" pitchFamily="34" charset="0"/>
-                        <a:ea typeface="Arial" panose="020B0604020202090204" pitchFamily="34" charset="0"/>
-                        <a:cs typeface="Arial" panose="020B0604020202090204" pitchFamily="34" charset="0"/>
-                      </a:endParaRPr>
-                    </a:p>
-                  </a:txBody>
-                  <a:tcPr anchor="ctr">
-                    <a:lnL w="6350" cap="flat" cmpd="sng" algn="ctr">
-                      <a:solidFill>
-                        <a:srgbClr val="555555"/>
-                      </a:solidFill>
-                      <a:prstDash val="solid"/>
-                      <a:round/>
-                      <a:headEnd type="none" w="med" len="med"/>
-                      <a:tailEnd type="none" w="med" len="med"/>
-                    </a:lnL>
-                    <a:lnR w="6350" cap="flat" cmpd="sng" algn="ctr">
-                      <a:solidFill>
-                        <a:srgbClr val="555555"/>
-                      </a:solidFill>
-                      <a:prstDash val="solid"/>
-                      <a:round/>
-                      <a:headEnd type="none" w="med" len="med"/>
-                      <a:tailEnd type="none" w="med" len="med"/>
-                    </a:lnR>
-                    <a:lnT w="6350" cap="flat" cmpd="sng" algn="ctr">
-                      <a:solidFill>
-                        <a:srgbClr val="555555"/>
-                      </a:solidFill>
-                      <a:prstDash val="solid"/>
-                      <a:round/>
-                      <a:headEnd type="none" w="med" len="med"/>
-                      <a:tailEnd type="none" w="med" len="med"/>
-                    </a:lnT>
-                    <a:lnB w="6350" cap="flat" cmpd="sng" algn="ctr">
-                      <a:solidFill>
-                        <a:srgbClr val="555555"/>
-                      </a:solidFill>
-                      <a:prstDash val="solid"/>
-                      <a:round/>
-                      <a:headEnd type="none" w="med" len="med"/>
-                      <a:tailEnd type="none" w="med" len="med"/>
-                    </a:lnB>
-                    <a:solidFill>
-                      <a:srgbClr val="F5F5F5"/>
-                    </a:solidFill>
-                  </a:tcPr>
-                </a:tc>
-                <a:tc>
-                  <a:txBody>
-                    <a:bodyPr/>
-                    <a:lstStyle/>
-                    <a:p>
-                      <a:pPr marL="0" indent="0" algn="l">
-                        <a:buNone/>
-                      </a:pPr>
-                      <a:r>
-                        <a:rPr lang="en-US" sz="1100" dirty="0">
-                          <a:solidFill>
-                            <a:srgbClr val="000000"/>
-                          </a:solidFill>
-                          <a:latin typeface="Arial" panose="020B0604020202090204" pitchFamily="34" charset="0"/>
-                          <a:ea typeface="Arial" panose="020B0604020202090204" pitchFamily="34" charset="-122"/>
-                          <a:cs typeface="Arial" panose="020B0604020202090204" pitchFamily="34" charset="-120"/>
-                        </a:rPr>
-                        <a:t>111/112</a:t>
-                      </a:r>
-                      <a:endParaRPr lang="en-US" sz="1100" dirty="0">
-                        <a:latin typeface="Arial" panose="020B0604020202090204" pitchFamily="34" charset="0"/>
-                        <a:ea typeface="Arial" panose="020B0604020202090204" pitchFamily="34" charset="0"/>
-                        <a:cs typeface="Arial" panose="020B0604020202090204" pitchFamily="34" charset="0"/>
-                      </a:endParaRPr>
-                    </a:p>
-                  </a:txBody>
-                  <a:tcPr anchor="ctr">
-                    <a:lnL w="6350" cap="flat" cmpd="sng" algn="ctr">
-                      <a:solidFill>
-                        <a:srgbClr val="555555"/>
-                      </a:solidFill>
-                      <a:prstDash val="solid"/>
-                      <a:round/>
-                      <a:headEnd type="none" w="med" len="med"/>
-                      <a:tailEnd type="none" w="med" len="med"/>
-                    </a:lnL>
-                    <a:lnR w="6350" cap="flat" cmpd="sng" algn="ctr">
-                      <a:solidFill>
-                        <a:srgbClr val="555555"/>
-                      </a:solidFill>
-                      <a:prstDash val="solid"/>
-                      <a:round/>
-                      <a:headEnd type="none" w="med" len="med"/>
-                      <a:tailEnd type="none" w="med" len="med"/>
-                    </a:lnR>
-                    <a:lnT w="6350" cap="flat" cmpd="sng" algn="ctr">
-                      <a:solidFill>
-                        <a:srgbClr val="555555"/>
-                      </a:solidFill>
-                      <a:prstDash val="solid"/>
-                      <a:round/>
-                      <a:headEnd type="none" w="med" len="med"/>
-                      <a:tailEnd type="none" w="med" len="med"/>
-                    </a:lnT>
-                    <a:lnB w="6350" cap="flat" cmpd="sng" algn="ctr">
-                      <a:solidFill>
-                        <a:srgbClr val="555555"/>
-                      </a:solidFill>
-                      <a:prstDash val="solid"/>
-                      <a:round/>
-                      <a:headEnd type="none" w="med" len="med"/>
-                      <a:tailEnd type="none" w="med" len="med"/>
-                    </a:lnB>
-                    <a:solidFill>
-                      <a:srgbClr val="F5F5F5"/>
-                    </a:solidFill>
-                  </a:tcPr>
-                </a:tc>
-                <a:tc>
-                  <a:txBody>
-                    <a:bodyPr/>
-                    <a:lstStyle/>
-                    <a:p>
-                      <a:pPr marL="0" indent="0" algn="l">
-                        <a:buNone/>
-                      </a:pPr>
-                      <a:r>
-                        <a:rPr lang="en-US" sz="1100" dirty="0">
-                          <a:solidFill>
-                            <a:srgbClr val="000000"/>
-                          </a:solidFill>
-                          <a:latin typeface="Arial" panose="020B0604020202090204" pitchFamily="34" charset="0"/>
-                          <a:ea typeface="Arial" panose="020B0604020202090204" pitchFamily="34" charset="-122"/>
-                          <a:cs typeface="Arial" panose="020B0604020202090204" pitchFamily="34" charset="-120"/>
-                        </a:rPr>
-                        <a:t>—</a:t>
-                      </a:r>
-                      <a:endParaRPr lang="en-US" sz="1100" dirty="0">
-                        <a:latin typeface="Arial" panose="020B0604020202090204" pitchFamily="34" charset="0"/>
-                        <a:ea typeface="Arial" panose="020B0604020202090204" pitchFamily="34" charset="0"/>
-                        <a:cs typeface="Arial" panose="020B0604020202090204" pitchFamily="34" charset="0"/>
-                      </a:endParaRPr>
-                    </a:p>
-                  </a:txBody>
-                  <a:tcPr anchor="ctr">
-                    <a:lnL w="6350" cap="flat" cmpd="sng" algn="ctr">
-                      <a:solidFill>
-                        <a:srgbClr val="555555"/>
-                      </a:solidFill>
-                      <a:prstDash val="solid"/>
-                      <a:round/>
-                      <a:headEnd type="none" w="med" len="med"/>
-                      <a:tailEnd type="none" w="med" len="med"/>
-                    </a:lnL>
-                    <a:lnR w="6350" cap="flat" cmpd="sng" algn="ctr">
-                      <a:solidFill>
-                        <a:srgbClr val="555555"/>
-                      </a:solidFill>
-                      <a:prstDash val="solid"/>
-                      <a:round/>
-                      <a:headEnd type="none" w="med" len="med"/>
-                      <a:tailEnd type="none" w="med" len="med"/>
-                    </a:lnR>
-                    <a:lnT w="6350" cap="flat" cmpd="sng" algn="ctr">
-                      <a:solidFill>
-                        <a:srgbClr val="555555"/>
-                      </a:solidFill>
-                      <a:prstDash val="solid"/>
-                      <a:round/>
-                      <a:headEnd type="none" w="med" len="med"/>
-                      <a:tailEnd type="none" w="med" len="med"/>
-                    </a:lnT>
-                    <a:lnB w="6350" cap="flat" cmpd="sng" algn="ctr">
-                      <a:solidFill>
-                        <a:srgbClr val="555555"/>
-                      </a:solidFill>
-                      <a:prstDash val="solid"/>
-                      <a:round/>
-                      <a:headEnd type="none" w="med" len="med"/>
-                      <a:tailEnd type="none" w="med" len="med"/>
-                    </a:lnB>
-                    <a:solidFill>
-                      <a:srgbClr val="F5F5F5"/>
-                    </a:solidFill>
-                  </a:tcPr>
-                </a:tc>
-                <a:tc>
-                  <a:txBody>
-                    <a:bodyPr/>
-                    <a:lstStyle/>
-                    <a:p>
-                      <a:pPr marL="0" indent="0" algn="l">
-                        <a:buNone/>
-                      </a:pPr>
-                      <a:r>
-                        <a:rPr lang="en-US" sz="1100" dirty="0">
-                          <a:solidFill>
-                            <a:srgbClr val="000000"/>
-                          </a:solidFill>
-                          <a:latin typeface="Arial" panose="020B0604020202090204" pitchFamily="34" charset="0"/>
-                          <a:ea typeface="Arial" panose="020B0604020202090204" pitchFamily="34" charset="-122"/>
-                          <a:cs typeface="Arial" panose="020B0604020202090204" pitchFamily="34" charset="-120"/>
-                        </a:rPr>
-                        <a:t>—</a:t>
-                      </a:r>
-                      <a:endParaRPr lang="en-US" sz="1100" dirty="0">
-                        <a:latin typeface="Arial" panose="020B0604020202090204" pitchFamily="34" charset="0"/>
-                        <a:ea typeface="Arial" panose="020B0604020202090204" pitchFamily="34" charset="0"/>
-                        <a:cs typeface="Arial" panose="020B0604020202090204" pitchFamily="34" charset="0"/>
-                      </a:endParaRPr>
-                    </a:p>
-                  </a:txBody>
-                  <a:tcPr anchor="ctr">
-                    <a:lnL w="6350" cap="flat" cmpd="sng" algn="ctr">
-                      <a:solidFill>
-                        <a:srgbClr val="555555"/>
-                      </a:solidFill>
-                      <a:prstDash val="solid"/>
-                      <a:round/>
-                      <a:headEnd type="none" w="med" len="med"/>
-                      <a:tailEnd type="none" w="med" len="med"/>
-                    </a:lnL>
-                    <a:lnR w="6350" cap="flat" cmpd="sng" algn="ctr">
-                      <a:solidFill>
-                        <a:srgbClr val="555555"/>
-                      </a:solidFill>
-                      <a:prstDash val="solid"/>
-                      <a:round/>
-                      <a:headEnd type="none" w="med" len="med"/>
-                      <a:tailEnd type="none" w="med" len="med"/>
-                    </a:lnR>
-                    <a:lnT w="6350" cap="flat" cmpd="sng" algn="ctr">
-                      <a:solidFill>
-                        <a:srgbClr val="555555"/>
-                      </a:solidFill>
-                      <a:prstDash val="solid"/>
-                      <a:round/>
-                      <a:headEnd type="none" w="med" len="med"/>
-                      <a:tailEnd type="none" w="med" len="med"/>
-                    </a:lnT>
-                    <a:lnB w="6350" cap="flat" cmpd="sng" algn="ctr">
-                      <a:solidFill>
-                        <a:srgbClr val="555555"/>
-                      </a:solidFill>
-                      <a:prstDash val="solid"/>
-                      <a:round/>
-                      <a:headEnd type="none" w="med" len="med"/>
-                      <a:tailEnd type="none" w="med" len="med"/>
-                    </a:lnB>
-                    <a:solidFill>
-                      <a:srgbClr val="F5F5F5"/>
-                    </a:solidFill>
-                  </a:tcPr>
-                </a:tc>
-                <a:tc>
-                  <a:txBody>
-                    <a:bodyPr/>
-                    <a:lstStyle/>
-                    <a:p>
-                      <a:pPr marL="0" indent="0" algn="l">
-                        <a:buNone/>
-                      </a:pPr>
-                      <a:r>
-                        <a:rPr lang="en-US" sz="1100" dirty="0">
-                          <a:solidFill>
-                            <a:srgbClr val="000000"/>
-                          </a:solidFill>
-                          <a:latin typeface="Arial" panose="020B0604020202090204" pitchFamily="34" charset="0"/>
-                          <a:ea typeface="Arial" panose="020B0604020202090204" pitchFamily="34" charset="-122"/>
-                          <a:cs typeface="Arial" panose="020B0604020202090204" pitchFamily="34" charset="-120"/>
-                        </a:rPr>
-                        <a:t>partial CV coverage (informational)</a:t>
-                      </a:r>
-                      <a:endParaRPr lang="en-US" sz="1100" dirty="0">
-                        <a:latin typeface="Arial" panose="020B0604020202090204" pitchFamily="34" charset="0"/>
-                        <a:ea typeface="Arial" panose="020B0604020202090204" pitchFamily="34" charset="0"/>
-                        <a:cs typeface="Arial" panose="020B0604020202090204" pitchFamily="34" charset="0"/>
-                      </a:endParaRPr>
-                    </a:p>
-                  </a:txBody>
-                  <a:tcPr anchor="ctr">
-                    <a:lnL w="6350" cap="flat" cmpd="sng" algn="ctr">
-                      <a:solidFill>
-                        <a:srgbClr val="555555"/>
-                      </a:solidFill>
-                      <a:prstDash val="solid"/>
-                      <a:round/>
-                      <a:headEnd type="none" w="med" len="med"/>
-                      <a:tailEnd type="none" w="med" len="med"/>
-                    </a:lnL>
-                    <a:lnR w="6350" cap="flat" cmpd="sng" algn="ctr">
-                      <a:solidFill>
-                        <a:srgbClr val="555555"/>
-                      </a:solidFill>
-                      <a:prstDash val="solid"/>
-                      <a:round/>
-                      <a:headEnd type="none" w="med" len="med"/>
-                      <a:tailEnd type="none" w="med" len="med"/>
-                    </a:lnR>
-                    <a:lnT w="6350" cap="flat" cmpd="sng" algn="ctr">
-                      <a:solidFill>
-                        <a:srgbClr val="555555"/>
-                      </a:solidFill>
-                      <a:prstDash val="solid"/>
-                      <a:round/>
-                      <a:headEnd type="none" w="med" len="med"/>
-                      <a:tailEnd type="none" w="med" len="med"/>
-                    </a:lnT>
-                    <a:lnB w="6350" cap="flat" cmpd="sng" algn="ctr">
-                      <a:solidFill>
-                        <a:srgbClr val="555555"/>
-                      </a:solidFill>
-                      <a:prstDash val="solid"/>
-                      <a:round/>
-                      <a:headEnd type="none" w="med" len="med"/>
-                      <a:tailEnd type="none" w="med" len="med"/>
-                    </a:lnB>
-                    <a:solidFill>
-                      <a:srgbClr val="F5F5F5"/>
-                    </a:solidFill>
-                  </a:tcPr>
-                </a:tc>
-              </a:tr>
-            </a:tbl>
-          </a:graphicData>
-        </a:graphic>
-      </p:graphicFrame>
-      <p:sp>
-        <p:nvSpPr>
-          <p:cNvPr id="6" name="Text 3"/>
-          <p:cNvSpPr/>
-          <p:nvPr/>
-        </p:nvSpPr>
-        <p:spPr>
-          <a:xfrm>
-            <a:off x="457200" y="4114800"/>
-            <a:ext cx="11277295" cy="2011680"/>
-          </a:xfrm>
-          <a:prstGeom prst="rect">
-            <a:avLst/>
-          </a:prstGeom>
-          <a:noFill/>
-        </p:spPr>
-        <p:txBody>
-          <a:bodyPr wrap="square" rtlCol="0" anchor="t"/>
-          <a:lstStyle/>
-          <a:p>
-            <a:pPr marL="342900" indent="-342900" algn="l">
-              <a:spcAft>
-                <a:spcPts val="600"/>
-              </a:spcAft>
-              <a:buSzPct val="100000"/>
-              <a:buChar char="•"/>
-            </a:pPr>
-            <a:r>
-              <a:rPr lang="en-US" sz="1400" b="1" dirty="0">
-                <a:solidFill>
-                  <a:srgbClr val="000000"/>
-                </a:solidFill>
-                <a:latin typeface="Arial" panose="020B0604020202090204" pitchFamily="34" charset="0"/>
-                <a:ea typeface="Arial" panose="020B0604020202090204" pitchFamily="34" charset="-122"/>
-                <a:cs typeface="Arial" panose="020B0604020202090204" pitchFamily="34" charset="-120"/>
-              </a:rPr>
-              <a:t>Strongest evidence: Pf A-A (4HPX) → s=14.91 matches St closed (3CEP) → cross-species validation</a:t>
-            </a:r>
-            <a:r>
-              <a:rPr lang="en-US" sz="1400" dirty="0">
-                <a:solidFill>
-                  <a:srgbClr val="000000"/>
-                </a:solidFill>
-                <a:latin typeface="Arial" panose="020B0604020202090204" pitchFamily="34" charset="0"/>
-                <a:ea typeface="Arial" panose="020B0604020202090204" pitchFamily="34" charset="-122"/>
-                <a:cs typeface="Arial" panose="020B0604020202090204" pitchFamily="34" charset="-120"/>
-              </a:rPr>
-              <a:t>All endpoints project correctly; z values all ≤ 0.025 nm² (structures ARE on the path)</a:t>
-            </a:r>
-            <a:r>
-              <a:rPr lang="en-US" sz="1400" dirty="0">
-                <a:solidFill>
-                  <a:srgbClr val="000000"/>
-                </a:solidFill>
-                <a:latin typeface="Arial" panose="020B0604020202090204" pitchFamily="34" charset="0"/>
-                <a:ea typeface="Arial" panose="020B0604020202090204" pitchFamily="34" charset="-122"/>
-                <a:cs typeface="Arial" panose="020B0604020202090204" pitchFamily="34" charset="-120"/>
-              </a:rPr>
-              <a:t>Conclusion: CV physics is correct — problem is kinetic timescale, not CV pathology</a:t>
-            </a:r>
-            <a:endParaRPr lang="en-US" sz="1400" dirty="0"/>
-          </a:p>
-        </p:txBody>
-      </p:sp>
-      <p:sp>
-        <p:nvSpPr>
-          <p:cNvPr id="7" name="Text 4"/>
-          <p:cNvSpPr/>
-          <p:nvPr/>
-        </p:nvSpPr>
-        <p:spPr>
-          <a:xfrm>
-            <a:off x="457200" y="6510528"/>
-            <a:ext cx="11277295" cy="182880"/>
-          </a:xfrm>
-          <a:prstGeom prst="rect">
-            <a:avLst/>
-          </a:prstGeom>
-          <a:noFill/>
-        </p:spPr>
-        <p:txBody>
-          <a:bodyPr wrap="square" rtlCol="0" anchor="ctr"/>
-          <a:lstStyle/>
-          <a:p>
-            <a:pPr marL="0" indent="0" algn="l">
-              <a:buNone/>
-            </a:pPr>
-            <a:r>
-              <a:rPr lang="en-US" sz="900" dirty="0">
-                <a:solidFill>
-                  <a:srgbClr val="555555"/>
-                </a:solidFill>
-                <a:latin typeface="Arial" panose="020B0604020202090204" pitchFamily="34" charset="0"/>
-                <a:ea typeface="Arial" panose="020B0604020202090204" pitchFamily="34" charset="-122"/>
-                <a:cs typeface="Arial" panose="020B0604020202090204" pitchFamily="34" charset="-120"/>
-              </a:rPr>
-              <a:t>Slide 8 / 10  ·  CV audit script: .worktrees/cv-audit/project_structures.py (exit 0 / 2 / 3 / 4 gate)</a:t>
-            </a:r>
-            <a:endParaRPr lang="en-US" sz="900" dirty="0"/>
-          </a:p>
-        </p:txBody>
-      </p:sp>
-    </p:spTree>
-  </p:cSld>
-  <p:clrMapOvr>
-    <a:masterClrMapping/>
-  </p:clrMapOvr>
-</p:sld>
-</file>
-
-<file path=ppt/slides/slide8.xml><?xml version="1.0" encoding="utf-8"?>
-<p:sld xmlns:a="http://schemas.openxmlformats.org/drawingml/2006/main" xmlns:r="http://schemas.openxmlformats.org/officeDocument/2006/relationships" xmlns:p="http://schemas.openxmlformats.org/presentationml/2006/main">
-  <p:cSld>
-    <p:bg>
-      <p:bgPr>
-        <a:solidFill>
-          <a:srgbClr val="FFFFFF"/>
-        </a:solidFill>
-        <a:effectLst/>
-      </p:bgPr>
-    </p:bg>
-    <p:spTree>
-      <p:nvGrpSpPr>
-        <p:cNvPr id="1" name=""/>
-        <p:cNvGrpSpPr/>
-        <p:nvPr/>
-      </p:nvGrpSpPr>
-      <p:grpSpPr>
-        <a:xfrm>
-          <a:off x="0" y="0"/>
-          <a:ext cx="0" cy="0"/>
-          <a:chOff x="0" y="0"/>
-          <a:chExt cx="0" cy="0"/>
-        </a:xfrm>
-      </p:grpSpPr>
-      <p:sp>
-        <p:nvSpPr>
-          <p:cNvPr id="2" name="Shape 0"/>
-          <p:cNvSpPr/>
-          <p:nvPr/>
-        </p:nvSpPr>
-        <p:spPr>
-          <a:xfrm>
-            <a:off x="0" y="6821424"/>
-            <a:ext cx="12191695" cy="36576"/>
-          </a:xfrm>
-          <a:prstGeom prst="rect">
-            <a:avLst/>
-          </a:prstGeom>
-          <a:solidFill>
-            <a:srgbClr val="333333"/>
-          </a:solidFill>
-          <a:ln w="12700">
-            <a:solidFill>
-              <a:srgbClr val="333333"/>
-            </a:solidFill>
-            <a:prstDash val="solid"/>
-          </a:ln>
-        </p:spPr>
-      </p:sp>
-      <p:sp>
-        <p:nvSpPr>
-          <p:cNvPr id="3" name="Text 1"/>
-          <p:cNvSpPr/>
-          <p:nvPr/>
-        </p:nvSpPr>
-        <p:spPr>
-          <a:xfrm>
-            <a:off x="457200" y="320040"/>
-            <a:ext cx="11277295" cy="640080"/>
-          </a:xfrm>
-          <a:prstGeom prst="rect">
-            <a:avLst/>
-          </a:prstGeom>
-          <a:noFill/>
-        </p:spPr>
-        <p:txBody>
-          <a:bodyPr wrap="square" rtlCol="0" anchor="ctr"/>
-          <a:lstStyle/>
-          <a:p>
-            <a:pPr marL="0" indent="0" algn="l">
-              <a:buNone/>
-            </a:pPr>
-            <a:r>
-              <a:rPr lang="en-US" sz="2200" b="1" dirty="0">
-                <a:solidFill>
-                  <a:srgbClr val="000000"/>
-                </a:solidFill>
-                <a:latin typeface="Arial" panose="020B0604020202090204" pitchFamily="34" charset="0"/>
-                <a:ea typeface="Arial" panose="020B0604020202090204" pitchFamily="34" charset="-122"/>
-                <a:cs typeface="Arial" panose="020B0604020202090204" pitchFamily="34" charset="-120"/>
-              </a:rPr>
               <a:t>Job 44008381 — safe checkpoint restart, 10 → 50 ns (running now)</a:t>
             </a:r>
             <a:endParaRPr lang="en-US" sz="2200" dirty="0"/>
@@ -8209,7 +5019,7 @@
 </p:sld>
 </file>
 
-<file path=ppt/slides/slide9.xml><?xml version="1.0" encoding="utf-8"?>
+<file path=ppt/slides/slide8.xml><?xml version="1.0" encoding="utf-8"?>
 <p:sld xmlns:a="http://schemas.openxmlformats.org/drawingml/2006/main" xmlns:r="http://schemas.openxmlformats.org/officeDocument/2006/relationships" xmlns:p="http://schemas.openxmlformats.org/presentationml/2006/main">
   <p:cSld>
     <p:bg>
